--- a/protected-downloads/praesentation/TL11.pptx
+++ b/protected-downloads/praesentation/TL11.pptx
@@ -590,7 +590,17 @@
           <a:lstStyle/>
           <a:p>
             <a:r>
-              <a:t>Siehe Trainerhandbuch (Sektion 3) für Moderationshinweise, Timing und erwartete Teilnehmerreaktionen.</a:t>
+              <a:t>Einstiegsrunde (08:30–08:45): Was hat Sie bei Ihrer letzten Auswahlentscheidung im Rückblick überrascht? TN notieren 2 Min. – dann kurzer Austausch. Nicht bewerten, nur sammeln.</a:t>
+            </a:r>
+          </a:p>
+          <a:p>
+            <a:r>
+              <a:t>Kosten-Cluster an Flipchart: direkt (Recruiting, Einarbeitung), indirekt (Teamproduktivität), relational (Kundenbeziehungen). TN nennen Beispiele.</a:t>
+            </a:r>
+          </a:p>
+          <a:p>
+            <a:r>
+              <a:t>Überleitung: Wie viele Entwicklungsgespräche investieren Sie in bestehende Mitarbeitende – und wie viele Stunden in die Vorbereitung eines Einstellungsgesprächs? Meistens ist das Verhältnis umgekehrt zur Hebelwirkung.</a:t>
             </a:r>
           </a:p>
         </p:txBody>
@@ -660,17 +670,17 @@
           <a:lstStyle/>
           <a:p>
             <a:r>
-              <a:t>Einstiegsrunde (08:30–08:45): Was hat Sie bei Ihrer letzten Auswahlentscheidung im Rückblick überrascht? TN notieren 2 Min. – dann kurzer Austausch. Nicht bewerten, nur sammeln.</a:t>
-            </a:r>
-          </a:p>
-          <a:p>
-            <a:r>
-              <a:t>Kosten-Cluster an Flipchart: direkt (Recruiting, Einarbeitung), indirekt (Teamproduktivität), relational (Kundenbeziehungen). TN nennen Beispiele.</a:t>
-            </a:r>
-          </a:p>
-          <a:p>
-            <a:r>
-              <a:t>Überleitung: Wie viele Entwicklungsgespräche investieren Sie in bestehende Mitarbeitende – und wie viele Stunden in die Vorbereitung eines Einstellungsgesprächs? Meistens ist das Verhältnis umgekehrt zur Hebelwirkung.</a:t>
+              <a:t>Kristof-Brown et al. (2005): Person-Organisation-Fit ist kaum durch Entwicklungsmaßnahmen veränderbar – Person-Job-Fit schon. Das ist die empirische Grundlage der asymmetrischen Einstellungslogik.</a:t>
+            </a:r>
+          </a:p>
+          <a:p>
+            <a:r>
+              <a:t>Genossenschaftlicher Kontext: Beziehungsorientierung und Verlässlichkeit sind nicht nur Erfolgsfaktoren – sie sind Selbstverständnis. Ein Berater, der Beziehungen als Mittel behandelt, ändert das nicht durch Training.</a:t>
+            </a:r>
+          </a:p>
+          <a:p>
+            <a:r>
+              <a:t>Fachkompetenz-Liste vorlesen und verankern: Das ist das Programm der Einarbeitung – nicht der Auswahl.</a:t>
             </a:r>
           </a:p>
         </p:txBody>
@@ -740,17 +750,22 @@
           <a:lstStyle/>
           <a:p>
             <a:r>
-              <a:t>Kristof-Brown et al. (2005): Person-Organisation-Fit ist kaum durch Entwicklungsmaßnahmen veränderbar – Person-Job-Fit schon. Das ist die empirische Grundlage der asymmetrischen Einstellungslogik.</a:t>
-            </a:r>
-          </a:p>
-          <a:p>
-            <a:r>
-              <a:t>Genossenschaftlicher Kontext: Beziehungsorientierung und Verlässlichkeit sind nicht nur Erfolgsfaktoren – sie sind Selbstverständnis. Ein Berater, der Beziehungen als Mittel behandelt, ändert das nicht durch Training.</a:t>
-            </a:r>
-          </a:p>
-          <a:p>
-            <a:r>
-              <a:t>Fachkompetenz-Liste vorlesen und verankern: Das ist das Programm der Einarbeitung – nicht der Auswahl.</a:t>
+              <a:t>Quelle: Schmidt &amp; Hunter (1998) – Meta-Analyse aus 85 Jahren Selektionsforschung, über 19.000 Validitätsstudien. Die Tabelle braucht kein langes Theoriereden – die Zahlen sprechen.</a:t>
+            </a:r>
+          </a:p>
+          <a:p>
+            <a:r>
+              <a:t>Reflexionsfragen im Plenum: 'Wie haben Sie Ihr letztes Gespräch geführt – eher strukturiert oder eher nach Gespür?' Und: 'Was passiert, wenn nach einem sehr schwachen Kandidaten ein mittelmäßiger folgt?' (Kontrasteffekt einführen.)</a:t>
+            </a:r>
+          </a:p>
+          <a:p>
+            <a:r>
+              <a:t>Häufige TN-Reaktion auf r = 0,38 unstrukturiert: 'Das ist doch auch gut!' Reaktion des Trainers: 'Das bedeutet, dass diese Methode in ca. 62 % der Fälle nicht richtig liegt. Als einzige Grundlage für eine Entscheidung, die das 1–2-fache eines Jahresgehalts kostet?'</a:t>
+            </a:r>
+          </a:p>
+          <a:p>
+            <a:r>
+              <a:t>Vier kognitive Verzerrungen benennen: Halo-Effekt, Ähnlichkeitsverzerrung (similar-to-me), Kontrasteffekt, Bestätigungsfehler. Campion et al. (1997): entstehen systematisch in wenig strukturierten Situationen – unabhängig von Erfahrung.</a:t>
             </a:r>
           </a:p>
         </p:txBody>
@@ -820,22 +835,22 @@
           <a:lstStyle/>
           <a:p>
             <a:r>
-              <a:t>Quelle: Schmidt &amp; Hunter (1998) – Meta-Analyse aus 85 Jahren Selektionsforschung, über 19.000 Validitätsstudien. Die Tabelle braucht kein langes Theoriereden – die Zahlen sprechen.</a:t>
-            </a:r>
-          </a:p>
-          <a:p>
-            <a:r>
-              <a:t>Reflexionsfragen im Plenum: 'Wie haben Sie Ihr letztes Gespräch geführt – eher strukturiert oder eher nach Gespür?' Und: 'Was passiert, wenn nach einem sehr schwachen Kandidaten ein mittelmäßiger folgt?' (Kontrasteffekt einführen.)</a:t>
-            </a:r>
-          </a:p>
-          <a:p>
-            <a:r>
-              <a:t>Häufige TN-Reaktion auf r = 0,38 unstrukturiert: 'Das ist doch auch gut!' Reaktion des Trainers: 'Das bedeutet, dass diese Methode in ca. 62 % der Fälle nicht richtig liegt. Als einzige Grundlage für eine Entscheidung, die das 1–2-fache eines Jahresgehalts kostet?'</a:t>
-            </a:r>
-          </a:p>
-          <a:p>
-            <a:r>
-              <a:t>Vier kognitive Verzerrungen benennen: Halo-Effekt, Ähnlichkeitsverzerrung (similar-to-me), Kontrasteffekt, Bestätigungsfehler. Campion et al. (1997): entstehen systematisch in wenig strukturierten Situationen – unabhängig von Erfahrung.</a:t>
+              <a:t>STAR-Formulierungswerkstatt (10:00–10:35): Einzelarbeit 15 Min. – TN füllen AB-1 Schritte 1 und 2 aus: eigenes Anforderungsprofil für ihre Stelle, zwei Haltungskriterien + zwei STAR-Fragen + Bewertungsanker.</a:t>
+            </a:r>
+          </a:p>
+          <a:p>
+            <a:r>
+              <a:t>Peer-Feedback in 2er-Paaren (15 Min.): Partner prüft STAR-Fragen anhand drei Selbstcheck-Kriterien (AGG-frei, gleicher Maßstab, Verhaltensbasis). Kein allgemeines 'ich würde das anders machen' – nur die drei Kriterien.</a:t>
+            </a:r>
+          </a:p>
+          <a:p>
+            <a:r>
+              <a:t>Häufigstes Problem: hypothetische Fragen statt verhaltensbasierter. Trainer-Umformulierungssatz: 'Erzählen Sie mir von einem Moment, in dem das tatsächlich so war – nicht was Sie generell tun würden.'</a:t>
+            </a:r>
+          </a:p>
+          <a:p>
+            <a:r>
+              <a:t>Kurze Plenumsrunde (5 Min.): Welche Frage hat den Peer-Check am stärksten herausgefordert – und warum?</a:t>
             </a:r>
           </a:p>
         </p:txBody>
@@ -905,22 +920,17 @@
           <a:lstStyle/>
           <a:p>
             <a:r>
-              <a:t>STAR-Formulierungswerkstatt (10:00–10:35): Einzelarbeit 15 Min. – TN füllen AB-1 Schritte 1 und 2 aus: eigenes Anforderungsprofil für ihre Stelle, zwei Haltungskriterien + zwei STAR-Fragen + Bewertungsanker.</a:t>
-            </a:r>
-          </a:p>
-          <a:p>
-            <a:r>
-              <a:t>Peer-Feedback in 2er-Paaren (15 Min.): Partner prüft STAR-Fragen anhand drei Selbstcheck-Kriterien (AGG-frei, gleicher Maßstab, Verhaltensbasis). Kein allgemeines 'ich würde das anders machen' – nur die drei Kriterien.</a:t>
-            </a:r>
-          </a:p>
-          <a:p>
-            <a:r>
-              <a:t>Häufigstes Problem: hypothetische Fragen statt verhaltensbasierter. Trainer-Umformulierungssatz: 'Erzählen Sie mir von einem Moment, in dem das tatsächlich so war – nicht was Sie generell tun würden.'</a:t>
-            </a:r>
-          </a:p>
-          <a:p>
-            <a:r>
-              <a:t>Kurze Plenumsrunde (5 Min.): Welche Frage hat den Peer-Check am stärksten herausgefordert – und warum?</a:t>
+              <a:t>Drei Beispiel-STAR-Fragen aus Sec 4 zeigen – nicht als Muster zum Kopieren, sondern als Struktur-Demonstration.</a:t>
+            </a:r>
+          </a:p>
+          <a:p>
+            <a:r>
+              <a:t>Nachfrage-Regel: Wenn nach zweitem Nachfragen kein konkretes Beispiel kommt, ist das ein diagnostisches Signal: Verhalten liegt entweder nicht vor oder geringe Reflexionsfähigkeit. Beides ist relevant für Haltungsbewertung.</a:t>
+            </a:r>
+          </a:p>
+          <a:p>
+            <a:r>
+              <a:t>Moderation (HB Sec 3): Ziel der Phase: TN haben am Ende mindestens zwei einsatzreife STAR-Fragen mit Bewertungsankern in der Hand – keine Muster aus dem Modul, sondern eigene Fragen für die eigene Stelle. Peer-Feedback moderieren: Trainer gibt dem Peer-Feedbackformat eine klare Struktur: Der Prüfer nutzt ausschließlich die drei Selbstcheck-Kriterien aus AB-1. Keine allgemeine Kritik, kein „ich würde das anders formulieren". Die Frage lautet: Erfüllt diese STAR-Frage das Kriterium – ja oder nein, und warum? Häufiges Problem: TN formulieren hypothetische Fragen statt verhaltensbasierter. Beispiel: „Was würden Sie tun, wenn ein Kunde unzufrieden ist?" – keine STAR-Frage. Trainer interveniert mit dem Umformulierungssatz: „Erzählen Sie mir von einem Moment, in dem ein Kunde tatsächlich unzufrieden war – was war die Situation?"</a:t>
             </a:r>
           </a:p>
         </p:txBody>
@@ -990,17 +1000,22 @@
           <a:lstStyle/>
           <a:p>
             <a:r>
-              <a:t>Drei Beispiel-STAR-Fragen aus Sec 4 zeigen – nicht als Muster zum Kopieren, sondern als Struktur-Demonstration.</a:t>
-            </a:r>
-          </a:p>
-          <a:p>
-            <a:r>
-              <a:t>Nachfrage-Regel: Wenn nach zweitem Nachfragen kein konkretes Beispiel kommt, ist das ein diagnostisches Signal: Verhalten liegt entweder nicht vor oder geringe Reflexionsfähigkeit. Beides ist relevant für Haltungsbewertung.</a:t>
-            </a:r>
-          </a:p>
-          <a:p>
-            <a:r>
-              <a:t>Moderation (HB Sec 3): Ziel der Phase: TN haben am Ende mindestens zwei einsatzreife STAR-Fragen mit Bewertungsankern in der Hand – keine Muster aus dem Modul, sondern eigene Fragen für die eigene Stelle. Peer-Feedback moderieren: Trainer gibt dem Peer-Feedbackformat eine klare Struktur: Der Prüfer nutzt ausschließlich die drei Selbstcheck-Kriterien aus AB-1. Keine allgemeine Kritik, kein „ich würde das anders formulieren". Die Frage lautet: Erfüllt diese STAR-Frage das Kriterium – ja oder nein, und warum? Häufiges Problem: TN formulieren hypothetische Fragen statt verhaltensbasierter. Beispiel: „Was würden Sie tun, wenn ein Kunde unzufrieden ist?" – keine STAR-Frage. Trainer interveniert mit dem Umformulierungssatz: „Erzählen Sie mir von einem Moment, in dem ein Kunde tatsächlich unzufrieden war – was war die Situation?"</a:t>
+              <a:t>§ 22 AGG: Beweislastumkehr. Eine einzige unzulässige Frage genügt – dann muss die Bank nachweisen, dass das Merkmal nicht ausschlaggebend war. In der Praxis kaum zu führen.</a:t>
+            </a:r>
+          </a:p>
+          <a:p>
+            <a:r>
+              <a:t>Interaktive Übung (5 Min.): Trainer liest 5 Fragen vor – TN zeigen Handzeichen zulässig / unzulässig / Grenzfall. Grenzfall-Frage: 'Haben Sie einen Führerschein?' – nur zulässig wenn Stelle nachweislich Fahrtätigkeit erfordert.</a:t>
+            </a:r>
+          </a:p>
+          <a:p>
+            <a:r>
+              <a:t>§ 99 BetrVG: Betriebsrat vor Einstellungszusage einschalten, nicht danach. Häufigste Falle: mündliche Zusage an Bewerber, bevor BR zugestimmt hat. Lösung: 'Wir haben eine klare Tendenz und melden uns verbindlich bis [Datum]; formal steht noch ein interner Schritt aus.'</a:t>
+            </a:r>
+          </a:p>
+          <a:p>
+            <a:r>
+              <a:t>DSGVO: Unterlagen nur an direkt Beteiligte, 6-Monats-Aufbewahrungsfrist, keine privaten Geräte, keine Sympathie-Notizen außerhalb Eignungsbewertung.</a:t>
             </a:r>
           </a:p>
         </p:txBody>
@@ -1026,91 +1041,6 @@
 </file>
 
 <file path=ppt/notesSlides/notesSlide8.xml><?xml version="1.0" encoding="utf-8"?>
-<p:notes xmlns:a="http://schemas.openxmlformats.org/drawingml/2006/main" xmlns:p="http://schemas.openxmlformats.org/presentationml/2006/main" xmlns:r="http://schemas.openxmlformats.org/officeDocument/2006/relationships">
-  <p:cSld>
-    <p:spTree>
-      <p:nvGrpSpPr>
-        <p:cNvPr id="1" name=""/>
-        <p:cNvGrpSpPr/>
-        <p:nvPr/>
-      </p:nvGrpSpPr>
-      <p:grpSpPr>
-        <a:xfrm>
-          <a:off x="0" y="0"/>
-          <a:ext cx="0" cy="0"/>
-          <a:chOff x="0" y="0"/>
-          <a:chExt cx="0" cy="0"/>
-        </a:xfrm>
-      </p:grpSpPr>
-      <p:sp>
-        <p:nvSpPr>
-          <p:cNvPr id="2" name="Slide Image Placeholder 1"/>
-          <p:cNvSpPr>
-            <a:spLocks noGrp="1"/>
-          </p:cNvSpPr>
-          <p:nvPr>
-            <p:ph type="sldImg" idx="2"/>
-          </p:nvPr>
-        </p:nvSpPr>
-        <p:spPr/>
-      </p:sp>
-      <p:sp>
-        <p:nvSpPr>
-          <p:cNvPr id="3" name="Notes Placeholder 2"/>
-          <p:cNvSpPr>
-            <a:spLocks noGrp="1"/>
-          </p:cNvSpPr>
-          <p:nvPr>
-            <p:ph type="body" idx="3" sz="quarter"/>
-          </p:nvPr>
-        </p:nvSpPr>
-        <p:spPr/>
-        <p:txBody>
-          <a:bodyPr/>
-          <a:lstStyle/>
-          <a:p>
-            <a:r>
-              <a:t>§ 22 AGG: Beweislastumkehr. Eine einzige unzulässige Frage genügt – dann muss die Bank nachweisen, dass das Merkmal nicht ausschlaggebend war. In der Praxis kaum zu führen.</a:t>
-            </a:r>
-          </a:p>
-          <a:p>
-            <a:r>
-              <a:t>Interaktive Übung (5 Min.): Trainer liest 5 Fragen vor – TN zeigen Handzeichen zulässig / unzulässig / Grenzfall. Grenzfall-Frage: 'Haben Sie einen Führerschein?' – nur zulässig wenn Stelle nachweislich Fahrtätigkeit erfordert.</a:t>
-            </a:r>
-          </a:p>
-          <a:p>
-            <a:r>
-              <a:t>§ 99 BetrVG: Betriebsrat vor Einstellungszusage einschalten, nicht danach. Häufigste Falle: mündliche Zusage an Bewerber, bevor BR zugestimmt hat. Lösung: 'Wir haben eine klare Tendenz und melden uns verbindlich bis [Datum]; formal steht noch ein interner Schritt aus.'</a:t>
-            </a:r>
-          </a:p>
-          <a:p>
-            <a:r>
-              <a:t>DSGVO: Unterlagen nur an direkt Beteiligte, 6-Monats-Aufbewahrungsfrist, keine privaten Geräte, keine Sympathie-Notizen außerhalb Eignungsbewertung.</a:t>
-            </a:r>
-          </a:p>
-        </p:txBody>
-      </p:sp>
-      <p:sp>
-        <p:nvSpPr>
-          <p:cNvPr id="4" name="Slide Number Placeholder 3"/>
-          <p:cNvSpPr>
-            <a:spLocks noGrp="1"/>
-          </p:cNvSpPr>
-          <p:nvPr>
-            <p:ph type="sldNum" idx="5" sz="quarter"/>
-          </p:nvPr>
-        </p:nvSpPr>
-        <p:spPr/>
-      </p:sp>
-    </p:spTree>
-  </p:cSld>
-  <p:clrMapOvr>
-    <a:masterClrMapping/>
-  </p:clrMapOvr>
-</p:notes>
-</file>
-
-<file path=ppt/notesSlides/notesSlide9.xml><?xml version="1.0" encoding="utf-8"?>
 <p:notes xmlns:a="http://schemas.openxmlformats.org/drawingml/2006/main" xmlns:p="http://schemas.openxmlformats.org/presentationml/2006/main" xmlns:r="http://schemas.openxmlformats.org/officeDocument/2006/relationships">
   <p:cSld>
     <p:spTree>
@@ -4615,7 +4545,7 @@
                 </a:solidFill>
                 <a:latin typeface="Arial"/>
               </a:rPr>
-              <a:t>v0.2</a:t>
+              <a:t>v1.0</a:t>
             </a:r>
           </a:p>
         </p:txBody>
@@ -9802,7 +9732,7 @@
             <a:avLst/>
           </a:prstGeom>
           <a:solidFill>
-            <a:srgbClr val="EDEDF3"/>
+            <a:srgbClr val="1F2C56"/>
           </a:solidFill>
           <a:ln>
             <a:noFill/>
@@ -9838,129 +9768,8 @@
         </p:nvSpPr>
         <p:spPr>
           <a:xfrm>
-            <a:off x="0" y="0"/>
-            <a:ext cx="12188952" cy="50292"/>
-          </a:xfrm>
-          <a:prstGeom prst="rect">
-            <a:avLst/>
-          </a:prstGeom>
-          <a:solidFill>
-            <a:srgbClr val="1F2C56"/>
-          </a:solidFill>
-          <a:ln>
-            <a:noFill/>
-          </a:ln>
-        </p:spPr>
-        <p:style>
-          <a:lnRef idx="1">
-            <a:schemeClr val="accent1"/>
-          </a:lnRef>
-          <a:fillRef idx="3">
-            <a:schemeClr val="accent1"/>
-          </a:fillRef>
-          <a:effectRef idx="2">
-            <a:schemeClr val="accent1"/>
-          </a:effectRef>
-          <a:fontRef idx="minor">
-            <a:schemeClr val="lt1"/>
-          </a:fontRef>
-        </p:style>
-        <p:txBody>
-          <a:bodyPr rtlCol="0" anchor="ctr"/>
-          <a:lstStyle/>
-          <a:p>
-            <a:pPr algn="ctr"/>
-          </a:p>
-        </p:txBody>
-      </p:sp>
-      <p:sp>
-        <p:nvSpPr>
-          <p:cNvPr id="4" name="TextBox 3"/>
-          <p:cNvSpPr txBox="1"/>
-          <p:nvPr/>
-        </p:nvSpPr>
-        <p:spPr>
-          <a:xfrm>
-            <a:off x="685800" y="109728"/>
-            <a:ext cx="10817352" cy="228600"/>
-          </a:xfrm>
-          <a:prstGeom prst="rect">
-            <a:avLst/>
-          </a:prstGeom>
-          <a:noFill/>
-        </p:spPr>
-        <p:txBody>
-          <a:bodyPr wrap="none">
-            <a:spAutoFit/>
-          </a:bodyPr>
-          <a:lstStyle/>
-          <a:p>
-            <a:pPr algn="l"/>
-            <a:r>
-              <a:rPr sz="750">
-                <a:solidFill>
-                  <a:srgbClr val="78808C"/>
-                </a:solidFill>
-                <a:latin typeface="Consolas"/>
-              </a:rPr>
-              <a:t>TL11  ·  INHALT</a:t>
-            </a:r>
-          </a:p>
-        </p:txBody>
-      </p:sp>
-      <p:sp>
-        <p:nvSpPr>
-          <p:cNvPr id="5" name="Rectangle 4"/>
-          <p:cNvSpPr/>
-          <p:nvPr/>
-        </p:nvSpPr>
-        <p:spPr>
-          <a:xfrm>
-            <a:off x="0" y="1234440"/>
-            <a:ext cx="12188952" cy="12700"/>
-          </a:xfrm>
-          <a:prstGeom prst="rect">
-            <a:avLst/>
-          </a:prstGeom>
-          <a:solidFill>
-            <a:srgbClr val="D8DFE4"/>
-          </a:solidFill>
-          <a:ln>
-            <a:noFill/>
-          </a:ln>
-        </p:spPr>
-        <p:style>
-          <a:lnRef idx="1">
-            <a:schemeClr val="accent1"/>
-          </a:lnRef>
-          <a:fillRef idx="3">
-            <a:schemeClr val="accent1"/>
-          </a:fillRef>
-          <a:effectRef idx="2">
-            <a:schemeClr val="accent1"/>
-          </a:effectRef>
-          <a:fontRef idx="minor">
-            <a:schemeClr val="lt1"/>
-          </a:fontRef>
-        </p:style>
-        <p:txBody>
-          <a:bodyPr rtlCol="0" anchor="ctr"/>
-          <a:lstStyle/>
-          <a:p>
-            <a:pPr algn="ctr"/>
-          </a:p>
-        </p:txBody>
-      </p:sp>
-      <p:sp>
-        <p:nvSpPr>
-          <p:cNvPr id="6" name="Rectangle 5"/>
-          <p:cNvSpPr/>
-          <p:nvPr/>
-        </p:nvSpPr>
-        <p:spPr>
-          <a:xfrm>
-            <a:off x="685800" y="502920"/>
-            <a:ext cx="36576" cy="658368"/>
+            <a:off x="685800" y="2788920"/>
+            <a:ext cx="548640" cy="38100"/>
           </a:xfrm>
           <a:prstGeom prst="rect">
             <a:avLst/>
@@ -9996,14 +9805,14 @@
       </p:sp>
       <p:sp>
         <p:nvSpPr>
-          <p:cNvPr id="7" name="TextBox 6"/>
+          <p:cNvPr id="4" name="TextBox 3"/>
           <p:cNvSpPr txBox="1"/>
           <p:nvPr/>
         </p:nvSpPr>
         <p:spPr>
           <a:xfrm>
-            <a:off x="813816" y="502920"/>
-            <a:ext cx="10634472" cy="685800"/>
+            <a:off x="685800" y="3017520"/>
+            <a:ext cx="10817352" cy="1463040"/>
           </a:xfrm>
           <a:prstGeom prst="rect">
             <a:avLst/>
@@ -10018,9 +9827,9 @@
           <a:p>
             <a:pPr algn="l"/>
             <a:r>
-              <a:rPr sz="2400" b="1" i="0">
-                <a:solidFill>
-                  <a:srgbClr val="1F2C56"/>
+              <a:rPr sz="4000" b="1" i="0">
+                <a:solidFill>
+                  <a:srgbClr val="FFFFFF"/>
                 </a:solidFill>
                 <a:latin typeface="Arial"/>
               </a:rPr>
@@ -10031,57 +9840,49 @@
       </p:sp>
       <p:sp>
         <p:nvSpPr>
-          <p:cNvPr id="8" name="Rectangle 7"/>
-          <p:cNvSpPr/>
-          <p:nvPr/>
-        </p:nvSpPr>
-        <p:spPr>
-          <a:xfrm>
-            <a:off x="0" y="6510528"/>
-            <a:ext cx="12188952" cy="347472"/>
-          </a:xfrm>
-          <a:prstGeom prst="rect">
-            <a:avLst/>
-          </a:prstGeom>
-          <a:solidFill>
-            <a:srgbClr val="0A1937"/>
-          </a:solidFill>
-          <a:ln>
-            <a:noFill/>
-          </a:ln>
-        </p:spPr>
-        <p:style>
-          <a:lnRef idx="1">
-            <a:schemeClr val="accent1"/>
-          </a:lnRef>
-          <a:fillRef idx="3">
-            <a:schemeClr val="accent1"/>
-          </a:fillRef>
-          <a:effectRef idx="2">
-            <a:schemeClr val="accent1"/>
-          </a:effectRef>
-          <a:fontRef idx="minor">
-            <a:schemeClr val="lt1"/>
-          </a:fontRef>
-        </p:style>
-        <p:txBody>
-          <a:bodyPr rtlCol="0" anchor="ctr"/>
-          <a:lstStyle/>
-          <a:p>
-            <a:pPr algn="ctr"/>
-          </a:p>
-        </p:txBody>
-      </p:sp>
-      <p:sp>
-        <p:nvSpPr>
-          <p:cNvPr id="9" name="TextBox 8"/>
+          <p:cNvPr id="5" name="TextBox 4"/>
           <p:cNvSpPr txBox="1"/>
           <p:nvPr/>
         </p:nvSpPr>
         <p:spPr>
           <a:xfrm>
-            <a:off x="685800" y="6583680"/>
-            <a:ext cx="6490411" cy="256032"/>
+            <a:off x="685800" y="4480560"/>
+            <a:ext cx="8653881" cy="1280160"/>
+          </a:xfrm>
+          <a:prstGeom prst="rect">
+            <a:avLst/>
+          </a:prstGeom>
+          <a:noFill/>
+        </p:spPr>
+        <p:txBody>
+          <a:bodyPr wrap="square">
+            <a:spAutoFit/>
+          </a:bodyPr>
+          <a:lstStyle/>
+          <a:p>
+            <a:pPr algn="l"/>
+            <a:r>
+              <a:rPr sz="1600" b="0" i="0">
+                <a:solidFill>
+                  <a:srgbClr val="C8D2E6"/>
+                </a:solidFill>
+                <a:latin typeface="Arial"/>
+              </a:rPr>
+              <a:t>Nicht das zehnte Entwicklungsgespräch – sondern das erste Einstellungsgespräch entscheidet.</a:t>
+            </a:r>
+          </a:p>
+        </p:txBody>
+      </p:sp>
+      <p:sp>
+        <p:nvSpPr>
+          <p:cNvPr id="6" name="TextBox 5"/>
+          <p:cNvSpPr txBox="1"/>
+          <p:nvPr/>
+        </p:nvSpPr>
+        <p:spPr>
+          <a:xfrm>
+            <a:off x="685800" y="6355080"/>
+            <a:ext cx="10817352" cy="274320"/>
           </a:xfrm>
           <a:prstGeom prst="rect">
             <a:avLst/>
@@ -10098,7 +9899,7 @@
             <a:r>
               <a:rPr sz="700">
                 <a:solidFill>
-                  <a:srgbClr val="A0B4D2"/>
+                  <a:srgbClr val="8CA0C3"/>
                 </a:solidFill>
                 <a:latin typeface="Consolas"/>
               </a:rPr>

--- a/protected-downloads/praesentation/TL11.pptx
+++ b/protected-downloads/praesentation/TL11.pptx
@@ -24,6 +24,7 @@
     <p:sldId id="272" r:id="rId24"/>
     <p:sldId id="273" r:id="rId25"/>
     <p:sldId id="274" r:id="rId26"/>
+    <p:sldId id="275" r:id="rId27"/>
   </p:sldIdLst>
   <p:sldSz cx="12188952" cy="6858000" type="screen4x3"/>
   <p:notesSz cx="6858000" cy="9144000"/>
@@ -1000,22 +1001,32 @@
           <a:lstStyle/>
           <a:p>
             <a:r>
-              <a:t>§ 22 AGG: Beweislastumkehr. Eine einzige unzulässige Frage genügt – dann muss die Bank nachweisen, dass das Merkmal nicht ausschlaggebend war. In der Praxis kaum zu führen.</a:t>
-            </a:r>
-          </a:p>
-          <a:p>
-            <a:r>
-              <a:t>Interaktive Übung (5 Min.): Trainer liest 5 Fragen vor – TN zeigen Handzeichen zulässig / unzulässig / Grenzfall. Grenzfall-Frage: 'Haben Sie einen Führerschein?' – nur zulässig wenn Stelle nachweislich Fahrtätigkeit erfordert.</a:t>
-            </a:r>
-          </a:p>
-          <a:p>
-            <a:r>
-              <a:t>§ 99 BetrVG: Betriebsrat vor Einstellungszusage einschalten, nicht danach. Häufigste Falle: mündliche Zusage an Bewerber, bevor BR zugestimmt hat. Lösung: 'Wir haben eine klare Tendenz und melden uns verbindlich bis [Datum]; formal steht noch ein interner Schritt aus.'</a:t>
-            </a:r>
-          </a:p>
-          <a:p>
-            <a:r>
-              <a:t>DSGVO: Unterlagen nur an direkt Beteiligte, 6-Monats-Aufbewahrungsfrist, keine privaten Geräte, keine Sympathie-Notizen außerhalb Eignungsbewertung.</a:t>
+              <a:t>Wichtige Moderationsregel: Trainer gibt Orientierungswerte der Musterlösung ERST NACH der Kleingruppenphase preis – nicht vorher. Die Überraschung 'Katharina liegt vorne?' ist ein produktiver Lernmoment.</a:t>
+            </a:r>
+          </a:p>
+          <a:p>
+            <a:r>
+              <a:t>Einzel-/Partnerarbeit (15 Min.): TN lesen STAR-Antworten und füllen Bewertungsmatrix aus. Kleingruppenauswertung (10 Min.): 2–3 Gruppen à 3–4 Personen kalibrieren – Ziel ist nicht Einigkeit, sondern explizite Begründung der Differenzen.</a:t>
+            </a:r>
+          </a:p>
+          <a:p>
+            <a:r>
+              <a:t>Trainer-Fokus Plenum (5 Min.): 'Wer hat Maximilian höher bewertet – und warum? Was sagt das über die Neigung zum Halo-Effekt?'</a:t>
+            </a:r>
+          </a:p>
+          <a:p>
+            <a:r>
+              <a:t>Reaktion 'Maximilian hat mehr Erfahrung': 'Welchen Validitätswert hat Berufserfahrung laut Schmidt &amp; Hunter? r = 0,18 – der schwächste Prädiktor in der Tabelle.'</a:t>
+            </a:r>
+          </a:p>
+          <a:p>
+            <a:r>
+              <a:t>Reaktion 'Katharina klingt unsicherer': 'Schauen Sie auf die STAR-Qualität, nicht auf die Wirkung. Was sagt die Antwort über das Verhalten – nicht über das Auftreten?'</a:t>
+            </a:r>
+          </a:p>
+          <a:p>
+            <a:r>
+              <a:t>Institutionelle Spannung explizit thematisieren: Wer 'Hire for the Soul' nur denkt, aber nicht gegenüber HR und GL begründet vertreten kann, trifft am Ende doch die Fachkompetenz-Entscheidung. Das ist der eigentliche Kompetenztest.</a:t>
             </a:r>
           </a:p>
         </p:txBody>
@@ -1041,6 +1052,91 @@
 </file>
 
 <file path=ppt/notesSlides/notesSlide8.xml><?xml version="1.0" encoding="utf-8"?>
+<p:notes xmlns:a="http://schemas.openxmlformats.org/drawingml/2006/main" xmlns:p="http://schemas.openxmlformats.org/presentationml/2006/main" xmlns:r="http://schemas.openxmlformats.org/officeDocument/2006/relationships">
+  <p:cSld>
+    <p:spTree>
+      <p:nvGrpSpPr>
+        <p:cNvPr id="1" name=""/>
+        <p:cNvGrpSpPr/>
+        <p:nvPr/>
+      </p:nvGrpSpPr>
+      <p:grpSpPr>
+        <a:xfrm>
+          <a:off x="0" y="0"/>
+          <a:ext cx="0" cy="0"/>
+          <a:chOff x="0" y="0"/>
+          <a:chExt cx="0" cy="0"/>
+        </a:xfrm>
+      </p:grpSpPr>
+      <p:sp>
+        <p:nvSpPr>
+          <p:cNvPr id="2" name="Slide Image Placeholder 1"/>
+          <p:cNvSpPr>
+            <a:spLocks noGrp="1"/>
+          </p:cNvSpPr>
+          <p:nvPr>
+            <p:ph type="sldImg" idx="2"/>
+          </p:nvPr>
+        </p:nvSpPr>
+        <p:spPr/>
+      </p:sp>
+      <p:sp>
+        <p:nvSpPr>
+          <p:cNvPr id="3" name="Notes Placeholder 2"/>
+          <p:cNvSpPr>
+            <a:spLocks noGrp="1"/>
+          </p:cNvSpPr>
+          <p:nvPr>
+            <p:ph type="body" idx="3" sz="quarter"/>
+          </p:nvPr>
+        </p:nvSpPr>
+        <p:spPr/>
+        <p:txBody>
+          <a:bodyPr/>
+          <a:lstStyle/>
+          <a:p>
+            <a:r>
+              <a:t>§ 22 AGG: Beweislastumkehr. Eine einzige unzulässige Frage genügt – dann muss die Bank nachweisen, dass das Merkmal nicht ausschlaggebend war. In der Praxis kaum zu führen.</a:t>
+            </a:r>
+          </a:p>
+          <a:p>
+            <a:r>
+              <a:t>Interaktive Übung (5 Min.): Trainer liest 5 Fragen vor – TN zeigen Handzeichen zulässig / unzulässig / Grenzfall. Grenzfall-Frage: 'Haben Sie einen Führerschein?' – nur zulässig wenn Stelle nachweislich Fahrtätigkeit erfordert.</a:t>
+            </a:r>
+          </a:p>
+          <a:p>
+            <a:r>
+              <a:t>§ 99 BetrVG: Betriebsrat vor Einstellungszusage einschalten, nicht danach. Häufigste Falle: mündliche Zusage an Bewerber, bevor BR zugestimmt hat. Lösung: 'Wir haben eine klare Tendenz und melden uns verbindlich bis [Datum]; formal steht noch ein interner Schritt aus.'</a:t>
+            </a:r>
+          </a:p>
+          <a:p>
+            <a:r>
+              <a:t>DSGVO: Unterlagen nur an direkt Beteiligte, 6-Monats-Aufbewahrungsfrist, keine privaten Geräte, keine Sympathie-Notizen außerhalb Eignungsbewertung.</a:t>
+            </a:r>
+          </a:p>
+        </p:txBody>
+      </p:sp>
+      <p:sp>
+        <p:nvSpPr>
+          <p:cNvPr id="4" name="Slide Number Placeholder 3"/>
+          <p:cNvSpPr>
+            <a:spLocks noGrp="1"/>
+          </p:cNvSpPr>
+          <p:nvPr>
+            <p:ph type="sldNum" idx="5" sz="quarter"/>
+          </p:nvPr>
+        </p:nvSpPr>
+        <p:spPr/>
+      </p:sp>
+    </p:spTree>
+  </p:cSld>
+  <p:clrMapOvr>
+    <a:masterClrMapping/>
+  </p:clrMapOvr>
+</p:notes>
+</file>
+
+<file path=ppt/notesSlides/notesSlide9.xml><?xml version="1.0" encoding="utf-8"?>
 <p:notes xmlns:a="http://schemas.openxmlformats.org/drawingml/2006/main" xmlns:p="http://schemas.openxmlformats.org/presentationml/2006/main" xmlns:r="http://schemas.openxmlformats.org/officeDocument/2006/relationships">
   <p:cSld>
     <p:spTree>
@@ -6845,6 +6941,49 @@
             <a:avLst/>
           </a:prstGeom>
           <a:solidFill>
+            <a:srgbClr val="EDEDF3"/>
+          </a:solidFill>
+          <a:ln>
+            <a:noFill/>
+          </a:ln>
+        </p:spPr>
+        <p:style>
+          <a:lnRef idx="1">
+            <a:schemeClr val="accent1"/>
+          </a:lnRef>
+          <a:fillRef idx="3">
+            <a:schemeClr val="accent1"/>
+          </a:fillRef>
+          <a:effectRef idx="2">
+            <a:schemeClr val="accent1"/>
+          </a:effectRef>
+          <a:fontRef idx="minor">
+            <a:schemeClr val="lt1"/>
+          </a:fontRef>
+        </p:style>
+        <p:txBody>
+          <a:bodyPr rtlCol="0" anchor="ctr"/>
+          <a:lstStyle/>
+          <a:p>
+            <a:pPr algn="ctr"/>
+          </a:p>
+        </p:txBody>
+      </p:sp>
+      <p:sp>
+        <p:nvSpPr>
+          <p:cNvPr id="3" name="Rectangle 2"/>
+          <p:cNvSpPr/>
+          <p:nvPr/>
+        </p:nvSpPr>
+        <p:spPr>
+          <a:xfrm>
+            <a:off x="0" y="0"/>
+            <a:ext cx="12188952" cy="50292"/>
+          </a:xfrm>
+          <a:prstGeom prst="rect">
+            <a:avLst/>
+          </a:prstGeom>
+          <a:solidFill>
             <a:srgbClr val="1F2C56"/>
           </a:solidFill>
           <a:ln>
@@ -6875,14 +7014,14 @@
       </p:sp>
       <p:sp>
         <p:nvSpPr>
-          <p:cNvPr id="3" name="TextBox 2"/>
+          <p:cNvPr id="4" name="TextBox 3"/>
           <p:cNvSpPr txBox="1"/>
           <p:nvPr/>
         </p:nvSpPr>
         <p:spPr>
           <a:xfrm>
-            <a:off x="685800" y="2377440"/>
-            <a:ext cx="10817352" cy="365760"/>
+            <a:off x="685800" y="109728"/>
+            <a:ext cx="10817352" cy="228600"/>
           </a:xfrm>
           <a:prstGeom prst="rect">
             <a:avLst/>
@@ -6897,27 +7036,70 @@
           <a:p>
             <a:pPr algn="l"/>
             <a:r>
-              <a:rPr sz="1200">
-                <a:solidFill>
-                  <a:srgbClr val="D9C089"/>
+              <a:rPr sz="750">
+                <a:solidFill>
+                  <a:srgbClr val="78808C"/>
                 </a:solidFill>
                 <a:latin typeface="Consolas"/>
               </a:rPr>
-              <a:t>IMPULS 4: AGG / § 99 BETRVG / DSGVO (11:05–11:20)</a:t>
-            </a:r>
-          </a:p>
-        </p:txBody>
-      </p:sp>
-      <p:sp>
-        <p:nvSpPr>
-          <p:cNvPr id="4" name="Rectangle 3"/>
+              <a:t>TL11  ·  PRAXISFALL</a:t>
+            </a:r>
+          </a:p>
+        </p:txBody>
+      </p:sp>
+      <p:sp>
+        <p:nvSpPr>
+          <p:cNvPr id="5" name="Rectangle 4"/>
           <p:cNvSpPr/>
           <p:nvPr/>
         </p:nvSpPr>
         <p:spPr>
           <a:xfrm>
-            <a:off x="685800" y="2788920"/>
-            <a:ext cx="548640" cy="38100"/>
+            <a:off x="0" y="1234440"/>
+            <a:ext cx="12188952" cy="12700"/>
+          </a:xfrm>
+          <a:prstGeom prst="rect">
+            <a:avLst/>
+          </a:prstGeom>
+          <a:solidFill>
+            <a:srgbClr val="D8DFE4"/>
+          </a:solidFill>
+          <a:ln>
+            <a:noFill/>
+          </a:ln>
+        </p:spPr>
+        <p:style>
+          <a:lnRef idx="1">
+            <a:schemeClr val="accent1"/>
+          </a:lnRef>
+          <a:fillRef idx="3">
+            <a:schemeClr val="accent1"/>
+          </a:fillRef>
+          <a:effectRef idx="2">
+            <a:schemeClr val="accent1"/>
+          </a:effectRef>
+          <a:fontRef idx="minor">
+            <a:schemeClr val="lt1"/>
+          </a:fontRef>
+        </p:style>
+        <p:txBody>
+          <a:bodyPr rtlCol="0" anchor="ctr"/>
+          <a:lstStyle/>
+          <a:p>
+            <a:pPr algn="ctr"/>
+          </a:p>
+        </p:txBody>
+      </p:sp>
+      <p:sp>
+        <p:nvSpPr>
+          <p:cNvPr id="6" name="Rectangle 5"/>
+          <p:cNvSpPr/>
+          <p:nvPr/>
+        </p:nvSpPr>
+        <p:spPr>
+          <a:xfrm>
+            <a:off x="685800" y="502920"/>
+            <a:ext cx="36576" cy="658368"/>
           </a:xfrm>
           <a:prstGeom prst="rect">
             <a:avLst/>
@@ -6953,14 +7135,14 @@
       </p:sp>
       <p:sp>
         <p:nvSpPr>
-          <p:cNvPr id="5" name="TextBox 4"/>
+          <p:cNvPr id="7" name="TextBox 6"/>
           <p:cNvSpPr txBox="1"/>
           <p:nvPr/>
         </p:nvSpPr>
         <p:spPr>
           <a:xfrm>
-            <a:off x="685800" y="3017520"/>
-            <a:ext cx="10817352" cy="1463040"/>
+            <a:off x="813816" y="502920"/>
+            <a:ext cx="10634472" cy="685800"/>
           </a:xfrm>
           <a:prstGeom prst="rect">
             <a:avLst/>
@@ -6975,27 +7157,150 @@
           <a:p>
             <a:pPr algn="l"/>
             <a:r>
-              <a:rPr sz="4000" b="1" i="0">
-                <a:solidFill>
-                  <a:srgbClr val="FFFFFF"/>
+              <a:rPr sz="2400" b="1" i="0">
+                <a:solidFill>
+                  <a:srgbClr val="1F2C56"/>
                 </a:solidFill>
                 <a:latin typeface="Arial"/>
               </a:rPr>
-              <a:t>Rechtssicherheit: Was der Teamleiter wissen muss – nicht was der Jurist weiß</a:t>
-            </a:r>
-          </a:p>
-        </p:txBody>
-      </p:sp>
-      <p:sp>
-        <p:nvSpPr>
-          <p:cNvPr id="6" name="TextBox 5"/>
+              <a:t>Teamleiterin Nina L. – VR-Bank Musterregion eG, Firmenkunden-Team</a:t>
+            </a:r>
+          </a:p>
+        </p:txBody>
+      </p:sp>
+      <p:sp>
+        <p:nvSpPr>
+          <p:cNvPr id="8" name="Rectangle 7"/>
+          <p:cNvSpPr/>
+          <p:nvPr/>
+        </p:nvSpPr>
+        <p:spPr>
+          <a:xfrm>
+            <a:off x="685800" y="1600200"/>
+            <a:ext cx="10817352" cy="2030982"/>
+          </a:xfrm>
+          <a:prstGeom prst="rect">
+            <a:avLst/>
+          </a:prstGeom>
+          <a:solidFill>
+            <a:srgbClr val="FFFFFF"/>
+          </a:solidFill>
+          <a:ln w="9525">
+            <a:solidFill>
+              <a:srgbClr val="D8DFE4"/>
+            </a:solidFill>
+          </a:ln>
+        </p:spPr>
+        <p:style>
+          <a:lnRef idx="1">
+            <a:schemeClr val="accent1"/>
+          </a:lnRef>
+          <a:fillRef idx="3">
+            <a:schemeClr val="accent1"/>
+          </a:fillRef>
+          <a:effectRef idx="2">
+            <a:schemeClr val="accent1"/>
+          </a:effectRef>
+          <a:fontRef idx="minor">
+            <a:schemeClr val="lt1"/>
+          </a:fontRef>
+        </p:style>
+        <p:txBody>
+          <a:bodyPr rtlCol="0" anchor="ctr"/>
+          <a:lstStyle/>
+          <a:p>
+            <a:pPr algn="ctr"/>
+          </a:p>
+        </p:txBody>
+      </p:sp>
+      <p:sp>
+        <p:nvSpPr>
+          <p:cNvPr id="9" name="Rectangle 8"/>
+          <p:cNvSpPr/>
+          <p:nvPr/>
+        </p:nvSpPr>
+        <p:spPr>
+          <a:xfrm>
+            <a:off x="685800" y="1600200"/>
+            <a:ext cx="36576" cy="2030982"/>
+          </a:xfrm>
+          <a:prstGeom prst="rect">
+            <a:avLst/>
+          </a:prstGeom>
+          <a:solidFill>
+            <a:srgbClr val="1F2C56"/>
+          </a:solidFill>
+          <a:ln>
+            <a:noFill/>
+          </a:ln>
+        </p:spPr>
+        <p:style>
+          <a:lnRef idx="1">
+            <a:schemeClr val="accent1"/>
+          </a:lnRef>
+          <a:fillRef idx="3">
+            <a:schemeClr val="accent1"/>
+          </a:fillRef>
+          <a:effectRef idx="2">
+            <a:schemeClr val="accent1"/>
+          </a:effectRef>
+          <a:fontRef idx="minor">
+            <a:schemeClr val="lt1"/>
+          </a:fontRef>
+        </p:style>
+        <p:txBody>
+          <a:bodyPr rtlCol="0" anchor="ctr"/>
+          <a:lstStyle/>
+          <a:p>
+            <a:pPr algn="ctr"/>
+          </a:p>
+        </p:txBody>
+      </p:sp>
+      <p:sp>
+        <p:nvSpPr>
+          <p:cNvPr id="10" name="TextBox 9"/>
           <p:cNvSpPr txBox="1"/>
           <p:nvPr/>
         </p:nvSpPr>
         <p:spPr>
           <a:xfrm>
-            <a:off x="685800" y="4480560"/>
-            <a:ext cx="8653881" cy="1280160"/>
+            <a:off x="941832" y="1783080"/>
+            <a:ext cx="10268712" cy="228600"/>
+          </a:xfrm>
+          <a:prstGeom prst="rect">
+            <a:avLst/>
+          </a:prstGeom>
+          <a:noFill/>
+        </p:spPr>
+        <p:txBody>
+          <a:bodyPr wrap="none">
+            <a:spAutoFit/>
+          </a:bodyPr>
+          <a:lstStyle/>
+          <a:p>
+            <a:pPr algn="l"/>
+            <a:r>
+              <a:rPr sz="750">
+                <a:solidFill>
+                  <a:srgbClr val="78808C"/>
+                </a:solidFill>
+                <a:latin typeface="Consolas"/>
+              </a:rPr>
+              <a:t>AUSGANGSSITUATION</a:t>
+            </a:r>
+          </a:p>
+        </p:txBody>
+      </p:sp>
+      <p:sp>
+        <p:nvSpPr>
+          <p:cNvPr id="11" name="TextBox 10"/>
+          <p:cNvSpPr txBox="1"/>
+          <p:nvPr/>
+        </p:nvSpPr>
+        <p:spPr>
+          <a:xfrm>
+            <a:off x="941832" y="2084831"/>
+            <a:ext cx="7680960" cy="1390902"/>
           </a:xfrm>
           <a:prstGeom prst="rect">
             <a:avLst/>
@@ -7008,29 +7313,77 @@
           </a:bodyPr>
           <a:lstStyle/>
           <a:p>
-            <a:pPr algn="l"/>
-            <a:r>
-              <a:rPr sz="1600" b="0" i="0">
-                <a:solidFill>
-                  <a:srgbClr val="C8D2E6"/>
+            <a:pPr>
+              <a:spcAft>
+                <a:spcPts val="600"/>
+              </a:spcAft>
+            </a:pPr>
+            <a:r>
+              <a:rPr sz="1300">
+                <a:solidFill>
+                  <a:srgbClr val="3D5466"/>
                 </a:solidFill>
                 <a:latin typeface="Arial"/>
               </a:rPr>
-              <a:t>Drei Handlungsanker kennen – und wissen, wann HR einzuschalten ist</a:t>
-            </a:r>
-          </a:p>
-        </p:txBody>
-      </p:sp>
-      <p:sp>
-        <p:nvSpPr>
-          <p:cNvPr id="7" name="TextBox 6"/>
+              <a:t>Nachbesetzung nach Abgang von Thomas K. (45 Kunden, 12 Mio. EUR Kreditvolumen). Zwei Finalisten: Maximilian S. (34 J., 8 Jahre FK, starkes Kreditanalysewissen, STAR-Antworten durchgängig abstrakt und ich-abstinent) und Katharina F. (28 J., 4 Jahre FK, Lücken in komplexer Sicherheitenstruktur, aber konkrete, ich-bezogene STAR-Antworten mit offenem Eingeständnis von Schwierigkeiten). Die institutionelle Spannung: HR-Kollegin und Bereichsleitung favorisieren Maximilian – „der kann sofort, den müssen wir nicht erst aufbauen." Nina muss ihr haltungsgewichtetes Anforderungsprofil nicht nur denken, sondern gegen diese Sicht begründet vertreten.
+</a:t>
+            </a:r>
+          </a:p>
+        </p:txBody>
+      </p:sp>
+      <p:sp>
+        <p:nvSpPr>
+          <p:cNvPr id="12" name="Rectangle 11"/>
+          <p:cNvSpPr/>
+          <p:nvPr/>
+        </p:nvSpPr>
+        <p:spPr>
+          <a:xfrm>
+            <a:off x="0" y="6510528"/>
+            <a:ext cx="12188952" cy="347472"/>
+          </a:xfrm>
+          <a:prstGeom prst="rect">
+            <a:avLst/>
+          </a:prstGeom>
+          <a:solidFill>
+            <a:srgbClr val="0A1937"/>
+          </a:solidFill>
+          <a:ln>
+            <a:noFill/>
+          </a:ln>
+        </p:spPr>
+        <p:style>
+          <a:lnRef idx="1">
+            <a:schemeClr val="accent1"/>
+          </a:lnRef>
+          <a:fillRef idx="3">
+            <a:schemeClr val="accent1"/>
+          </a:fillRef>
+          <a:effectRef idx="2">
+            <a:schemeClr val="accent1"/>
+          </a:effectRef>
+          <a:fontRef idx="minor">
+            <a:schemeClr val="lt1"/>
+          </a:fontRef>
+        </p:style>
+        <p:txBody>
+          <a:bodyPr rtlCol="0" anchor="ctr"/>
+          <a:lstStyle/>
+          <a:p>
+            <a:pPr algn="ctr"/>
+          </a:p>
+        </p:txBody>
+      </p:sp>
+      <p:sp>
+        <p:nvSpPr>
+          <p:cNvPr id="13" name="TextBox 12"/>
           <p:cNvSpPr txBox="1"/>
           <p:nvPr/>
         </p:nvSpPr>
         <p:spPr>
           <a:xfrm>
-            <a:off x="685800" y="6355080"/>
-            <a:ext cx="10817352" cy="274320"/>
+            <a:off x="685800" y="6583680"/>
+            <a:ext cx="6490411" cy="256032"/>
           </a:xfrm>
           <a:prstGeom prst="rect">
             <a:avLst/>
@@ -7047,11 +7400,46 @@
             <a:r>
               <a:rPr sz="700">
                 <a:solidFill>
-                  <a:srgbClr val="8CA0C3"/>
+                  <a:srgbClr val="A0B4D2"/>
                 </a:solidFill>
                 <a:latin typeface="Consolas"/>
               </a:rPr>
               <a:t>FKB Campus  ·  TL11</a:t>
+            </a:r>
+          </a:p>
+        </p:txBody>
+      </p:sp>
+      <p:sp>
+        <p:nvSpPr>
+          <p:cNvPr id="14" name="TextBox 13"/>
+          <p:cNvSpPr txBox="1"/>
+          <p:nvPr/>
+        </p:nvSpPr>
+        <p:spPr>
+          <a:xfrm>
+            <a:off x="7176211" y="6583680"/>
+            <a:ext cx="4326940" cy="256032"/>
+          </a:xfrm>
+          <a:prstGeom prst="rect">
+            <a:avLst/>
+          </a:prstGeom>
+          <a:noFill/>
+        </p:spPr>
+        <p:txBody>
+          <a:bodyPr wrap="none">
+            <a:spAutoFit/>
+          </a:bodyPr>
+          <a:lstStyle/>
+          <a:p>
+            <a:pPr algn="r"/>
+            <a:r>
+              <a:rPr sz="700">
+                <a:solidFill>
+                  <a:srgbClr val="A0B4D2"/>
+                </a:solidFill>
+                <a:latin typeface="Consolas"/>
+              </a:rPr>
+              <a:t>Fall zuerst lesen</a:t>
             </a:r>
           </a:p>
         </p:txBody>
@@ -7065,6 +7453,250 @@
 </file>
 
 <file path=ppt/slides/slide17.xml><?xml version="1.0" encoding="utf-8"?>
+<p:sld xmlns:a="http://schemas.openxmlformats.org/drawingml/2006/main" xmlns:p="http://schemas.openxmlformats.org/presentationml/2006/main" xmlns:r="http://schemas.openxmlformats.org/officeDocument/2006/relationships">
+  <p:cSld>
+    <p:spTree>
+      <p:nvGrpSpPr>
+        <p:cNvPr id="1" name=""/>
+        <p:cNvGrpSpPr/>
+        <p:nvPr/>
+      </p:nvGrpSpPr>
+      <p:grpSpPr/>
+      <p:sp>
+        <p:nvSpPr>
+          <p:cNvPr id="2" name="Rectangle 1"/>
+          <p:cNvSpPr/>
+          <p:nvPr/>
+        </p:nvSpPr>
+        <p:spPr>
+          <a:xfrm>
+            <a:off x="0" y="0"/>
+            <a:ext cx="12188952" cy="6858000"/>
+          </a:xfrm>
+          <a:prstGeom prst="rect">
+            <a:avLst/>
+          </a:prstGeom>
+          <a:solidFill>
+            <a:srgbClr val="1F2C56"/>
+          </a:solidFill>
+          <a:ln>
+            <a:noFill/>
+          </a:ln>
+        </p:spPr>
+        <p:style>
+          <a:lnRef idx="1">
+            <a:schemeClr val="accent1"/>
+          </a:lnRef>
+          <a:fillRef idx="3">
+            <a:schemeClr val="accent1"/>
+          </a:fillRef>
+          <a:effectRef idx="2">
+            <a:schemeClr val="accent1"/>
+          </a:effectRef>
+          <a:fontRef idx="minor">
+            <a:schemeClr val="lt1"/>
+          </a:fontRef>
+        </p:style>
+        <p:txBody>
+          <a:bodyPr rtlCol="0" anchor="ctr"/>
+          <a:lstStyle/>
+          <a:p>
+            <a:pPr algn="ctr"/>
+          </a:p>
+        </p:txBody>
+      </p:sp>
+      <p:sp>
+        <p:nvSpPr>
+          <p:cNvPr id="3" name="TextBox 2"/>
+          <p:cNvSpPr txBox="1"/>
+          <p:nvPr/>
+        </p:nvSpPr>
+        <p:spPr>
+          <a:xfrm>
+            <a:off x="685800" y="2377440"/>
+            <a:ext cx="10817352" cy="365760"/>
+          </a:xfrm>
+          <a:prstGeom prst="rect">
+            <a:avLst/>
+          </a:prstGeom>
+          <a:noFill/>
+        </p:spPr>
+        <p:txBody>
+          <a:bodyPr wrap="none">
+            <a:spAutoFit/>
+          </a:bodyPr>
+          <a:lstStyle/>
+          <a:p>
+            <a:pPr algn="l"/>
+            <a:r>
+              <a:rPr sz="1200">
+                <a:solidFill>
+                  <a:srgbClr val="D9C089"/>
+                </a:solidFill>
+                <a:latin typeface="Consolas"/>
+              </a:rPr>
+              <a:t>IMPULS 4: AGG / § 99 BETRVG / DSGVO (11:05–11:20)</a:t>
+            </a:r>
+          </a:p>
+        </p:txBody>
+      </p:sp>
+      <p:sp>
+        <p:nvSpPr>
+          <p:cNvPr id="4" name="Rectangle 3"/>
+          <p:cNvSpPr/>
+          <p:nvPr/>
+        </p:nvSpPr>
+        <p:spPr>
+          <a:xfrm>
+            <a:off x="685800" y="2788920"/>
+            <a:ext cx="548640" cy="38100"/>
+          </a:xfrm>
+          <a:prstGeom prst="rect">
+            <a:avLst/>
+          </a:prstGeom>
+          <a:solidFill>
+            <a:srgbClr val="D9C089"/>
+          </a:solidFill>
+          <a:ln>
+            <a:noFill/>
+          </a:ln>
+        </p:spPr>
+        <p:style>
+          <a:lnRef idx="1">
+            <a:schemeClr val="accent1"/>
+          </a:lnRef>
+          <a:fillRef idx="3">
+            <a:schemeClr val="accent1"/>
+          </a:fillRef>
+          <a:effectRef idx="2">
+            <a:schemeClr val="accent1"/>
+          </a:effectRef>
+          <a:fontRef idx="minor">
+            <a:schemeClr val="lt1"/>
+          </a:fontRef>
+        </p:style>
+        <p:txBody>
+          <a:bodyPr rtlCol="0" anchor="ctr"/>
+          <a:lstStyle/>
+          <a:p>
+            <a:pPr algn="ctr"/>
+          </a:p>
+        </p:txBody>
+      </p:sp>
+      <p:sp>
+        <p:nvSpPr>
+          <p:cNvPr id="5" name="TextBox 4"/>
+          <p:cNvSpPr txBox="1"/>
+          <p:nvPr/>
+        </p:nvSpPr>
+        <p:spPr>
+          <a:xfrm>
+            <a:off x="685800" y="3017520"/>
+            <a:ext cx="10817352" cy="1463040"/>
+          </a:xfrm>
+          <a:prstGeom prst="rect">
+            <a:avLst/>
+          </a:prstGeom>
+          <a:noFill/>
+        </p:spPr>
+        <p:txBody>
+          <a:bodyPr wrap="square">
+            <a:spAutoFit/>
+          </a:bodyPr>
+          <a:lstStyle/>
+          <a:p>
+            <a:pPr algn="l"/>
+            <a:r>
+              <a:rPr sz="4000" b="1" i="0">
+                <a:solidFill>
+                  <a:srgbClr val="FFFFFF"/>
+                </a:solidFill>
+                <a:latin typeface="Arial"/>
+              </a:rPr>
+              <a:t>Rechtssicherheit: Was der Teamleiter wissen muss – nicht was der Jurist weiß</a:t>
+            </a:r>
+          </a:p>
+        </p:txBody>
+      </p:sp>
+      <p:sp>
+        <p:nvSpPr>
+          <p:cNvPr id="6" name="TextBox 5"/>
+          <p:cNvSpPr txBox="1"/>
+          <p:nvPr/>
+        </p:nvSpPr>
+        <p:spPr>
+          <a:xfrm>
+            <a:off x="685800" y="4480560"/>
+            <a:ext cx="8653881" cy="1280160"/>
+          </a:xfrm>
+          <a:prstGeom prst="rect">
+            <a:avLst/>
+          </a:prstGeom>
+          <a:noFill/>
+        </p:spPr>
+        <p:txBody>
+          <a:bodyPr wrap="square">
+            <a:spAutoFit/>
+          </a:bodyPr>
+          <a:lstStyle/>
+          <a:p>
+            <a:pPr algn="l"/>
+            <a:r>
+              <a:rPr sz="1600" b="0" i="0">
+                <a:solidFill>
+                  <a:srgbClr val="C8D2E6"/>
+                </a:solidFill>
+                <a:latin typeface="Arial"/>
+              </a:rPr>
+              <a:t>Drei Handlungsanker kennen – und wissen, wann HR einzuschalten ist</a:t>
+            </a:r>
+          </a:p>
+        </p:txBody>
+      </p:sp>
+      <p:sp>
+        <p:nvSpPr>
+          <p:cNvPr id="7" name="TextBox 6"/>
+          <p:cNvSpPr txBox="1"/>
+          <p:nvPr/>
+        </p:nvSpPr>
+        <p:spPr>
+          <a:xfrm>
+            <a:off x="685800" y="6355080"/>
+            <a:ext cx="10817352" cy="274320"/>
+          </a:xfrm>
+          <a:prstGeom prst="rect">
+            <a:avLst/>
+          </a:prstGeom>
+          <a:noFill/>
+        </p:spPr>
+        <p:txBody>
+          <a:bodyPr wrap="none">
+            <a:spAutoFit/>
+          </a:bodyPr>
+          <a:lstStyle/>
+          <a:p>
+            <a:pPr algn="l"/>
+            <a:r>
+              <a:rPr sz="700">
+                <a:solidFill>
+                  <a:srgbClr val="8CA0C3"/>
+                </a:solidFill>
+                <a:latin typeface="Consolas"/>
+              </a:rPr>
+              <a:t>FKB Campus  ·  TL11</a:t>
+            </a:r>
+          </a:p>
+        </p:txBody>
+      </p:sp>
+    </p:spTree>
+  </p:cSld>
+  <p:clrMapOvr>
+    <a:masterClrMapping/>
+  </p:clrMapOvr>
+</p:sld>
+</file>
+
+<file path=ppt/slides/slide18.xml><?xml version="1.0" encoding="utf-8"?>
 <p:sld xmlns:a="http://schemas.openxmlformats.org/drawingml/2006/main" xmlns:p="http://schemas.openxmlformats.org/presentationml/2006/main" xmlns:r="http://schemas.openxmlformats.org/officeDocument/2006/relationships">
   <p:cSld>
     <p:spTree>
@@ -7549,250 +8181,6 @@
 </p:sld>
 </file>
 
-<file path=ppt/slides/slide18.xml><?xml version="1.0" encoding="utf-8"?>
-<p:sld xmlns:a="http://schemas.openxmlformats.org/drawingml/2006/main" xmlns:p="http://schemas.openxmlformats.org/presentationml/2006/main" xmlns:r="http://schemas.openxmlformats.org/officeDocument/2006/relationships">
-  <p:cSld>
-    <p:spTree>
-      <p:nvGrpSpPr>
-        <p:cNvPr id="1" name=""/>
-        <p:cNvGrpSpPr/>
-        <p:nvPr/>
-      </p:nvGrpSpPr>
-      <p:grpSpPr/>
-      <p:sp>
-        <p:nvSpPr>
-          <p:cNvPr id="2" name="Rectangle 1"/>
-          <p:cNvSpPr/>
-          <p:nvPr/>
-        </p:nvSpPr>
-        <p:spPr>
-          <a:xfrm>
-            <a:off x="0" y="0"/>
-            <a:ext cx="12188952" cy="6858000"/>
-          </a:xfrm>
-          <a:prstGeom prst="rect">
-            <a:avLst/>
-          </a:prstGeom>
-          <a:solidFill>
-            <a:srgbClr val="1F2C56"/>
-          </a:solidFill>
-          <a:ln>
-            <a:noFill/>
-          </a:ln>
-        </p:spPr>
-        <p:style>
-          <a:lnRef idx="1">
-            <a:schemeClr val="accent1"/>
-          </a:lnRef>
-          <a:fillRef idx="3">
-            <a:schemeClr val="accent1"/>
-          </a:fillRef>
-          <a:effectRef idx="2">
-            <a:schemeClr val="accent1"/>
-          </a:effectRef>
-          <a:fontRef idx="minor">
-            <a:schemeClr val="lt1"/>
-          </a:fontRef>
-        </p:style>
-        <p:txBody>
-          <a:bodyPr rtlCol="0" anchor="ctr"/>
-          <a:lstStyle/>
-          <a:p>
-            <a:pPr algn="ctr"/>
-          </a:p>
-        </p:txBody>
-      </p:sp>
-      <p:sp>
-        <p:nvSpPr>
-          <p:cNvPr id="3" name="TextBox 2"/>
-          <p:cNvSpPr txBox="1"/>
-          <p:nvPr/>
-        </p:nvSpPr>
-        <p:spPr>
-          <a:xfrm>
-            <a:off x="685800" y="2377440"/>
-            <a:ext cx="10817352" cy="365760"/>
-          </a:xfrm>
-          <a:prstGeom prst="rect">
-            <a:avLst/>
-          </a:prstGeom>
-          <a:noFill/>
-        </p:spPr>
-        <p:txBody>
-          <a:bodyPr wrap="none">
-            <a:spAutoFit/>
-          </a:bodyPr>
-          <a:lstStyle/>
-          <a:p>
-            <a:pPr algn="l"/>
-            <a:r>
-              <a:rPr sz="1200">
-                <a:solidFill>
-                  <a:srgbClr val="D9C089"/>
-                </a:solidFill>
-                <a:latin typeface="Consolas"/>
-              </a:rPr>
-              <a:t>TRANSFER &amp; ABSCHLUSS (12:10–12:25)</a:t>
-            </a:r>
-          </a:p>
-        </p:txBody>
-      </p:sp>
-      <p:sp>
-        <p:nvSpPr>
-          <p:cNvPr id="4" name="Rectangle 3"/>
-          <p:cNvSpPr/>
-          <p:nvPr/>
-        </p:nvSpPr>
-        <p:spPr>
-          <a:xfrm>
-            <a:off x="685800" y="2788920"/>
-            <a:ext cx="548640" cy="38100"/>
-          </a:xfrm>
-          <a:prstGeom prst="rect">
-            <a:avLst/>
-          </a:prstGeom>
-          <a:solidFill>
-            <a:srgbClr val="D9C089"/>
-          </a:solidFill>
-          <a:ln>
-            <a:noFill/>
-          </a:ln>
-        </p:spPr>
-        <p:style>
-          <a:lnRef idx="1">
-            <a:schemeClr val="accent1"/>
-          </a:lnRef>
-          <a:fillRef idx="3">
-            <a:schemeClr val="accent1"/>
-          </a:fillRef>
-          <a:effectRef idx="2">
-            <a:schemeClr val="accent1"/>
-          </a:effectRef>
-          <a:fontRef idx="minor">
-            <a:schemeClr val="lt1"/>
-          </a:fontRef>
-        </p:style>
-        <p:txBody>
-          <a:bodyPr rtlCol="0" anchor="ctr"/>
-          <a:lstStyle/>
-          <a:p>
-            <a:pPr algn="ctr"/>
-          </a:p>
-        </p:txBody>
-      </p:sp>
-      <p:sp>
-        <p:nvSpPr>
-          <p:cNvPr id="5" name="TextBox 4"/>
-          <p:cNvSpPr txBox="1"/>
-          <p:nvPr/>
-        </p:nvSpPr>
-        <p:spPr>
-          <a:xfrm>
-            <a:off x="685800" y="3017520"/>
-            <a:ext cx="10817352" cy="1463040"/>
-          </a:xfrm>
-          <a:prstGeom prst="rect">
-            <a:avLst/>
-          </a:prstGeom>
-          <a:noFill/>
-        </p:spPr>
-        <p:txBody>
-          <a:bodyPr wrap="square">
-            <a:spAutoFit/>
-          </a:bodyPr>
-          <a:lstStyle/>
-          <a:p>
-            <a:pPr algn="l"/>
-            <a:r>
-              <a:rPr sz="4000" b="1" i="0">
-                <a:solidFill>
-                  <a:srgbClr val="FFFFFF"/>
-                </a:solidFill>
-                <a:latin typeface="Arial"/>
-              </a:rPr>
-              <a:t>Train for the Role – Onboarding als Gegenleistung für die Einstellungsentscheidung</a:t>
-            </a:r>
-          </a:p>
-        </p:txBody>
-      </p:sp>
-      <p:sp>
-        <p:nvSpPr>
-          <p:cNvPr id="6" name="TextBox 5"/>
-          <p:cNvSpPr txBox="1"/>
-          <p:nvPr/>
-        </p:nvSpPr>
-        <p:spPr>
-          <a:xfrm>
-            <a:off x="685800" y="4480560"/>
-            <a:ext cx="8653881" cy="1280160"/>
-          </a:xfrm>
-          <a:prstGeom prst="rect">
-            <a:avLst/>
-          </a:prstGeom>
-          <a:noFill/>
-        </p:spPr>
-        <p:txBody>
-          <a:bodyPr wrap="square">
-            <a:spAutoFit/>
-          </a:bodyPr>
-          <a:lstStyle/>
-          <a:p>
-            <a:pPr algn="l"/>
-            <a:r>
-              <a:rPr sz="1600" b="0" i="0">
-                <a:solidFill>
-                  <a:srgbClr val="C8D2E6"/>
-                </a:solidFill>
-                <a:latin typeface="Arial"/>
-              </a:rPr>
-              <a:t>Drei Transferaufgaben verankern – und das Modul-Prinzip vollständig schließen</a:t>
-            </a:r>
-          </a:p>
-        </p:txBody>
-      </p:sp>
-      <p:sp>
-        <p:nvSpPr>
-          <p:cNvPr id="7" name="TextBox 6"/>
-          <p:cNvSpPr txBox="1"/>
-          <p:nvPr/>
-        </p:nvSpPr>
-        <p:spPr>
-          <a:xfrm>
-            <a:off x="685800" y="6355080"/>
-            <a:ext cx="10817352" cy="274320"/>
-          </a:xfrm>
-          <a:prstGeom prst="rect">
-            <a:avLst/>
-          </a:prstGeom>
-          <a:noFill/>
-        </p:spPr>
-        <p:txBody>
-          <a:bodyPr wrap="none">
-            <a:spAutoFit/>
-          </a:bodyPr>
-          <a:lstStyle/>
-          <a:p>
-            <a:pPr algn="l"/>
-            <a:r>
-              <a:rPr sz="700">
-                <a:solidFill>
-                  <a:srgbClr val="8CA0C3"/>
-                </a:solidFill>
-                <a:latin typeface="Consolas"/>
-              </a:rPr>
-              <a:t>FKB Campus  ·  TL11</a:t>
-            </a:r>
-          </a:p>
-        </p:txBody>
-      </p:sp>
-    </p:spTree>
-  </p:cSld>
-  <p:clrMapOvr>
-    <a:masterClrMapping/>
-  </p:clrMapOvr>
-</p:sld>
-</file>
-
 <file path=ppt/slides/slide19.xml><?xml version="1.0" encoding="utf-8"?>
 <p:sld xmlns:a="http://schemas.openxmlformats.org/drawingml/2006/main" xmlns:p="http://schemas.openxmlformats.org/presentationml/2006/main" xmlns:r="http://schemas.openxmlformats.org/officeDocument/2006/relationships">
   <p:cSld>
@@ -7818,7 +8206,7 @@
             <a:avLst/>
           </a:prstGeom>
           <a:solidFill>
-            <a:srgbClr val="EDEDF3"/>
+            <a:srgbClr val="1F2C56"/>
           </a:solidFill>
           <a:ln>
             <a:noFill/>
@@ -7848,57 +8236,14 @@
       </p:sp>
       <p:sp>
         <p:nvSpPr>
-          <p:cNvPr id="3" name="Rectangle 2"/>
-          <p:cNvSpPr/>
-          <p:nvPr/>
-        </p:nvSpPr>
-        <p:spPr>
-          <a:xfrm>
-            <a:off x="0" y="0"/>
-            <a:ext cx="12188952" cy="50292"/>
-          </a:xfrm>
-          <a:prstGeom prst="rect">
-            <a:avLst/>
-          </a:prstGeom>
-          <a:solidFill>
-            <a:srgbClr val="1F2C56"/>
-          </a:solidFill>
-          <a:ln>
-            <a:noFill/>
-          </a:ln>
-        </p:spPr>
-        <p:style>
-          <a:lnRef idx="1">
-            <a:schemeClr val="accent1"/>
-          </a:lnRef>
-          <a:fillRef idx="3">
-            <a:schemeClr val="accent1"/>
-          </a:fillRef>
-          <a:effectRef idx="2">
-            <a:schemeClr val="accent1"/>
-          </a:effectRef>
-          <a:fontRef idx="minor">
-            <a:schemeClr val="lt1"/>
-          </a:fontRef>
-        </p:style>
-        <p:txBody>
-          <a:bodyPr rtlCol="0" anchor="ctr"/>
-          <a:lstStyle/>
-          <a:p>
-            <a:pPr algn="ctr"/>
-          </a:p>
-        </p:txBody>
-      </p:sp>
-      <p:sp>
-        <p:nvSpPr>
-          <p:cNvPr id="4" name="TextBox 3"/>
+          <p:cNvPr id="3" name="TextBox 2"/>
           <p:cNvSpPr txBox="1"/>
           <p:nvPr/>
         </p:nvSpPr>
         <p:spPr>
           <a:xfrm>
-            <a:off x="685800" y="109728"/>
-            <a:ext cx="10817352" cy="228600"/>
+            <a:off x="685800" y="2377440"/>
+            <a:ext cx="10817352" cy="365760"/>
           </a:xfrm>
           <a:prstGeom prst="rect">
             <a:avLst/>
@@ -7913,70 +8258,27 @@
           <a:p>
             <a:pPr algn="l"/>
             <a:r>
-              <a:rPr sz="750">
-                <a:solidFill>
-                  <a:srgbClr val="78808C"/>
+              <a:rPr sz="1200">
+                <a:solidFill>
+                  <a:srgbClr val="D9C089"/>
                 </a:solidFill>
                 <a:latin typeface="Consolas"/>
               </a:rPr>
-              <a:t>TL11  ·  INHALT</a:t>
-            </a:r>
-          </a:p>
-        </p:txBody>
-      </p:sp>
-      <p:sp>
-        <p:nvSpPr>
-          <p:cNvPr id="5" name="Rectangle 4"/>
+              <a:t>TRANSFER &amp; ABSCHLUSS (12:10–12:25)</a:t>
+            </a:r>
+          </a:p>
+        </p:txBody>
+      </p:sp>
+      <p:sp>
+        <p:nvSpPr>
+          <p:cNvPr id="4" name="Rectangle 3"/>
           <p:cNvSpPr/>
           <p:nvPr/>
         </p:nvSpPr>
         <p:spPr>
           <a:xfrm>
-            <a:off x="0" y="1234440"/>
-            <a:ext cx="12188952" cy="12700"/>
-          </a:xfrm>
-          <a:prstGeom prst="rect">
-            <a:avLst/>
-          </a:prstGeom>
-          <a:solidFill>
-            <a:srgbClr val="D8DFE4"/>
-          </a:solidFill>
-          <a:ln>
-            <a:noFill/>
-          </a:ln>
-        </p:spPr>
-        <p:style>
-          <a:lnRef idx="1">
-            <a:schemeClr val="accent1"/>
-          </a:lnRef>
-          <a:fillRef idx="3">
-            <a:schemeClr val="accent1"/>
-          </a:fillRef>
-          <a:effectRef idx="2">
-            <a:schemeClr val="accent1"/>
-          </a:effectRef>
-          <a:fontRef idx="minor">
-            <a:schemeClr val="lt1"/>
-          </a:fontRef>
-        </p:style>
-        <p:txBody>
-          <a:bodyPr rtlCol="0" anchor="ctr"/>
-          <a:lstStyle/>
-          <a:p>
-            <a:pPr algn="ctr"/>
-          </a:p>
-        </p:txBody>
-      </p:sp>
-      <p:sp>
-        <p:nvSpPr>
-          <p:cNvPr id="6" name="Rectangle 5"/>
-          <p:cNvSpPr/>
-          <p:nvPr/>
-        </p:nvSpPr>
-        <p:spPr>
-          <a:xfrm>
-            <a:off x="685800" y="502920"/>
-            <a:ext cx="36576" cy="658368"/>
+            <a:off x="685800" y="2788920"/>
+            <a:ext cx="548640" cy="38100"/>
           </a:xfrm>
           <a:prstGeom prst="rect">
             <a:avLst/>
@@ -8012,14 +8314,14 @@
       </p:sp>
       <p:sp>
         <p:nvSpPr>
-          <p:cNvPr id="7" name="TextBox 6"/>
+          <p:cNvPr id="5" name="TextBox 4"/>
           <p:cNvSpPr txBox="1"/>
           <p:nvPr/>
         </p:nvSpPr>
         <p:spPr>
           <a:xfrm>
-            <a:off x="813816" y="502920"/>
-            <a:ext cx="10634472" cy="685800"/>
+            <a:off x="685800" y="3017520"/>
+            <a:ext cx="10817352" cy="1463040"/>
           </a:xfrm>
           <a:prstGeom prst="rect">
             <a:avLst/>
@@ -8034,27 +8336,27 @@
           <a:p>
             <a:pPr algn="l"/>
             <a:r>
-              <a:rPr sz="2400" b="1" i="0">
-                <a:solidFill>
-                  <a:srgbClr val="1F2C56"/>
+              <a:rPr sz="4000" b="1" i="0">
+                <a:solidFill>
+                  <a:srgbClr val="FFFFFF"/>
                 </a:solidFill>
                 <a:latin typeface="Arial"/>
               </a:rPr>
-              <a:t>Wer für die Haltung einstellt, schuldet der Person den Fach-Aufbau</a:t>
-            </a:r>
-          </a:p>
-        </p:txBody>
-      </p:sp>
-      <p:sp>
-        <p:nvSpPr>
-          <p:cNvPr id="8" name="TextBox 7"/>
+              <a:t>Train for the Role – Onboarding als Gegenleistung für die Einstellungsentscheidung</a:t>
+            </a:r>
+          </a:p>
+        </p:txBody>
+      </p:sp>
+      <p:sp>
+        <p:nvSpPr>
+          <p:cNvPr id="6" name="TextBox 5"/>
           <p:cNvSpPr txBox="1"/>
           <p:nvPr/>
         </p:nvSpPr>
         <p:spPr>
           <a:xfrm>
-            <a:off x="685800" y="1417320"/>
-            <a:ext cx="10817352" cy="4892040"/>
+            <a:off x="685800" y="4480560"/>
+            <a:ext cx="8653881" cy="1280160"/>
           </a:xfrm>
           <a:prstGeom prst="rect">
             <a:avLst/>
@@ -8062,160 +8364,34 @@
           <a:noFill/>
         </p:spPr>
         <p:txBody>
-          <a:bodyPr wrap="square" anchor="ctr">
+          <a:bodyPr wrap="square">
             <a:spAutoFit/>
           </a:bodyPr>
           <a:lstStyle/>
           <a:p>
-            <a:pPr marL="190500" indent="-190500">
-              <a:spcBef>
-                <a:spcPts val="400"/>
-              </a:spcBef>
-              <a:spcAft>
-                <a:spcPts val="200"/>
-              </a:spcAft>
-            </a:pPr>
-            <a:r>
-              <a:rPr sz="1300">
-                <a:solidFill>
-                  <a:srgbClr val="3D5466"/>
+            <a:pPr algn="l"/>
+            <a:r>
+              <a:rPr sz="1600" b="0" i="0">
+                <a:solidFill>
+                  <a:srgbClr val="C8D2E6"/>
                 </a:solidFill>
                 <a:latin typeface="Arial"/>
               </a:rPr>
-              <a:t>▸  Einarbeitungsplan: Fachkompetenz-Meilensteine nach 4 / 12 / 26 Wochen.</a:t>
-            </a:r>
-          </a:p>
-          <a:p>
-            <a:pPr marL="190500" indent="-190500">
-              <a:spcBef>
-                <a:spcPts val="400"/>
-              </a:spcBef>
-              <a:spcAft>
-                <a:spcPts val="200"/>
-              </a:spcAft>
-            </a:pPr>
-            <a:r>
-              <a:rPr sz="1300">
-                <a:solidFill>
-                  <a:srgbClr val="3D5466"/>
-                </a:solidFill>
-                <a:latin typeface="Arial"/>
-              </a:rPr>
-              <a:t>▸  Die Lücken aus dem Anforderungsprofil sind das Programm – kein Zufall.</a:t>
-            </a:r>
-          </a:p>
-          <a:p>
-            <a:pPr marL="190500" indent="-190500">
-              <a:spcBef>
-                <a:spcPts val="400"/>
-              </a:spcBef>
-              <a:spcAft>
-                <a:spcPts val="200"/>
-              </a:spcAft>
-            </a:pPr>
-            <a:r>
-              <a:rPr sz="1300">
-                <a:solidFill>
-                  <a:srgbClr val="3D5466"/>
-                </a:solidFill>
-                <a:latin typeface="Arial"/>
-              </a:rPr>
-              <a:t>▸  Pate/Mentor benennen; erste Feedbackgespräche terminieren (Brücke zu TL06).</a:t>
-            </a:r>
-          </a:p>
-          <a:p>
-            <a:pPr marL="190500" indent="-190500">
-              <a:spcBef>
-                <a:spcPts val="400"/>
-              </a:spcBef>
-              <a:spcAft>
-                <a:spcPts val="200"/>
-              </a:spcAft>
-            </a:pPr>
-            <a:r>
-              <a:rPr sz="1300">
-                <a:solidFill>
-                  <a:srgbClr val="3D5466"/>
-                </a:solidFill>
-                <a:latin typeface="Arial"/>
-              </a:rPr>
-              <a:t>▸  Haltungsstarker Kandidat hat einen Anspruch auf fachliche Entwicklung.</a:t>
-            </a:r>
-          </a:p>
-          <a:p>
-            <a:pPr marL="190500" indent="-190500">
-              <a:spcBef>
-                <a:spcPts val="400"/>
-              </a:spcBef>
-              <a:spcAft>
-                <a:spcPts val="200"/>
-              </a:spcAft>
-            </a:pPr>
-            <a:r>
-              <a:rPr sz="1300">
-                <a:solidFill>
-                  <a:srgbClr val="3D5466"/>
-                </a:solidFill>
-                <a:latin typeface="Arial"/>
-              </a:rPr>
-              <a:t>▸  Der Einarbeitungsplan ist die Gegenleistung für 'Hire for the Soul.'</a:t>
-            </a:r>
-          </a:p>
-        </p:txBody>
-      </p:sp>
-      <p:sp>
-        <p:nvSpPr>
-          <p:cNvPr id="9" name="Rectangle 8"/>
-          <p:cNvSpPr/>
-          <p:nvPr/>
-        </p:nvSpPr>
-        <p:spPr>
-          <a:xfrm>
-            <a:off x="0" y="6510528"/>
-            <a:ext cx="12188952" cy="347472"/>
-          </a:xfrm>
-          <a:prstGeom prst="rect">
-            <a:avLst/>
-          </a:prstGeom>
-          <a:solidFill>
-            <a:srgbClr val="0A1937"/>
-          </a:solidFill>
-          <a:ln>
-            <a:noFill/>
-          </a:ln>
-        </p:spPr>
-        <p:style>
-          <a:lnRef idx="1">
-            <a:schemeClr val="accent1"/>
-          </a:lnRef>
-          <a:fillRef idx="3">
-            <a:schemeClr val="accent1"/>
-          </a:fillRef>
-          <a:effectRef idx="2">
-            <a:schemeClr val="accent1"/>
-          </a:effectRef>
-          <a:fontRef idx="minor">
-            <a:schemeClr val="lt1"/>
-          </a:fontRef>
-        </p:style>
-        <p:txBody>
-          <a:bodyPr rtlCol="0" anchor="ctr"/>
-          <a:lstStyle/>
-          <a:p>
-            <a:pPr algn="ctr"/>
-          </a:p>
-        </p:txBody>
-      </p:sp>
-      <p:sp>
-        <p:nvSpPr>
-          <p:cNvPr id="10" name="TextBox 9"/>
+              <a:t>Drei Transferaufgaben verankern – und das Modul-Prinzip vollständig schließen</a:t>
+            </a:r>
+          </a:p>
+        </p:txBody>
+      </p:sp>
+      <p:sp>
+        <p:nvSpPr>
+          <p:cNvPr id="7" name="TextBox 6"/>
           <p:cNvSpPr txBox="1"/>
           <p:nvPr/>
         </p:nvSpPr>
         <p:spPr>
           <a:xfrm>
-            <a:off x="685800" y="6583680"/>
-            <a:ext cx="6490411" cy="256032"/>
+            <a:off x="685800" y="6355080"/>
+            <a:ext cx="10817352" cy="274320"/>
           </a:xfrm>
           <a:prstGeom prst="rect">
             <a:avLst/>
@@ -8232,7 +8408,7 @@
             <a:r>
               <a:rPr sz="700">
                 <a:solidFill>
-                  <a:srgbClr val="A0B4D2"/>
+                  <a:srgbClr val="8CA0C3"/>
                 </a:solidFill>
                 <a:latin typeface="Consolas"/>
               </a:rPr>
@@ -8591,6 +8767,462 @@
       <p:sp>
         <p:nvSpPr>
           <p:cNvPr id="9" name="TextBox 8"/>
+          <p:cNvSpPr txBox="1"/>
+          <p:nvPr/>
+        </p:nvSpPr>
+        <p:spPr>
+          <a:xfrm>
+            <a:off x="685800" y="6583680"/>
+            <a:ext cx="6490411" cy="256032"/>
+          </a:xfrm>
+          <a:prstGeom prst="rect">
+            <a:avLst/>
+          </a:prstGeom>
+          <a:noFill/>
+        </p:spPr>
+        <p:txBody>
+          <a:bodyPr wrap="none">
+            <a:spAutoFit/>
+          </a:bodyPr>
+          <a:lstStyle/>
+          <a:p>
+            <a:pPr algn="l"/>
+            <a:r>
+              <a:rPr sz="700">
+                <a:solidFill>
+                  <a:srgbClr val="A0B4D2"/>
+                </a:solidFill>
+                <a:latin typeface="Consolas"/>
+              </a:rPr>
+              <a:t>FKB Campus  ·  TL11</a:t>
+            </a:r>
+          </a:p>
+        </p:txBody>
+      </p:sp>
+    </p:spTree>
+  </p:cSld>
+  <p:clrMapOvr>
+    <a:masterClrMapping/>
+  </p:clrMapOvr>
+</p:sld>
+</file>
+
+<file path=ppt/slides/slide20.xml><?xml version="1.0" encoding="utf-8"?>
+<p:sld xmlns:a="http://schemas.openxmlformats.org/drawingml/2006/main" xmlns:p="http://schemas.openxmlformats.org/presentationml/2006/main" xmlns:r="http://schemas.openxmlformats.org/officeDocument/2006/relationships">
+  <p:cSld>
+    <p:spTree>
+      <p:nvGrpSpPr>
+        <p:cNvPr id="1" name=""/>
+        <p:cNvGrpSpPr/>
+        <p:nvPr/>
+      </p:nvGrpSpPr>
+      <p:grpSpPr/>
+      <p:sp>
+        <p:nvSpPr>
+          <p:cNvPr id="2" name="Rectangle 1"/>
+          <p:cNvSpPr/>
+          <p:nvPr/>
+        </p:nvSpPr>
+        <p:spPr>
+          <a:xfrm>
+            <a:off x="0" y="0"/>
+            <a:ext cx="12188952" cy="6858000"/>
+          </a:xfrm>
+          <a:prstGeom prst="rect">
+            <a:avLst/>
+          </a:prstGeom>
+          <a:solidFill>
+            <a:srgbClr val="EDEDF3"/>
+          </a:solidFill>
+          <a:ln>
+            <a:noFill/>
+          </a:ln>
+        </p:spPr>
+        <p:style>
+          <a:lnRef idx="1">
+            <a:schemeClr val="accent1"/>
+          </a:lnRef>
+          <a:fillRef idx="3">
+            <a:schemeClr val="accent1"/>
+          </a:fillRef>
+          <a:effectRef idx="2">
+            <a:schemeClr val="accent1"/>
+          </a:effectRef>
+          <a:fontRef idx="minor">
+            <a:schemeClr val="lt1"/>
+          </a:fontRef>
+        </p:style>
+        <p:txBody>
+          <a:bodyPr rtlCol="0" anchor="ctr"/>
+          <a:lstStyle/>
+          <a:p>
+            <a:pPr algn="ctr"/>
+          </a:p>
+        </p:txBody>
+      </p:sp>
+      <p:sp>
+        <p:nvSpPr>
+          <p:cNvPr id="3" name="Rectangle 2"/>
+          <p:cNvSpPr/>
+          <p:nvPr/>
+        </p:nvSpPr>
+        <p:spPr>
+          <a:xfrm>
+            <a:off x="0" y="0"/>
+            <a:ext cx="12188952" cy="50292"/>
+          </a:xfrm>
+          <a:prstGeom prst="rect">
+            <a:avLst/>
+          </a:prstGeom>
+          <a:solidFill>
+            <a:srgbClr val="1F2C56"/>
+          </a:solidFill>
+          <a:ln>
+            <a:noFill/>
+          </a:ln>
+        </p:spPr>
+        <p:style>
+          <a:lnRef idx="1">
+            <a:schemeClr val="accent1"/>
+          </a:lnRef>
+          <a:fillRef idx="3">
+            <a:schemeClr val="accent1"/>
+          </a:fillRef>
+          <a:effectRef idx="2">
+            <a:schemeClr val="accent1"/>
+          </a:effectRef>
+          <a:fontRef idx="minor">
+            <a:schemeClr val="lt1"/>
+          </a:fontRef>
+        </p:style>
+        <p:txBody>
+          <a:bodyPr rtlCol="0" anchor="ctr"/>
+          <a:lstStyle/>
+          <a:p>
+            <a:pPr algn="ctr"/>
+          </a:p>
+        </p:txBody>
+      </p:sp>
+      <p:sp>
+        <p:nvSpPr>
+          <p:cNvPr id="4" name="TextBox 3"/>
+          <p:cNvSpPr txBox="1"/>
+          <p:nvPr/>
+        </p:nvSpPr>
+        <p:spPr>
+          <a:xfrm>
+            <a:off x="685800" y="109728"/>
+            <a:ext cx="10817352" cy="228600"/>
+          </a:xfrm>
+          <a:prstGeom prst="rect">
+            <a:avLst/>
+          </a:prstGeom>
+          <a:noFill/>
+        </p:spPr>
+        <p:txBody>
+          <a:bodyPr wrap="none">
+            <a:spAutoFit/>
+          </a:bodyPr>
+          <a:lstStyle/>
+          <a:p>
+            <a:pPr algn="l"/>
+            <a:r>
+              <a:rPr sz="750">
+                <a:solidFill>
+                  <a:srgbClr val="78808C"/>
+                </a:solidFill>
+                <a:latin typeface="Consolas"/>
+              </a:rPr>
+              <a:t>TL11  ·  INHALT</a:t>
+            </a:r>
+          </a:p>
+        </p:txBody>
+      </p:sp>
+      <p:sp>
+        <p:nvSpPr>
+          <p:cNvPr id="5" name="Rectangle 4"/>
+          <p:cNvSpPr/>
+          <p:nvPr/>
+        </p:nvSpPr>
+        <p:spPr>
+          <a:xfrm>
+            <a:off x="0" y="1234440"/>
+            <a:ext cx="12188952" cy="12700"/>
+          </a:xfrm>
+          <a:prstGeom prst="rect">
+            <a:avLst/>
+          </a:prstGeom>
+          <a:solidFill>
+            <a:srgbClr val="D8DFE4"/>
+          </a:solidFill>
+          <a:ln>
+            <a:noFill/>
+          </a:ln>
+        </p:spPr>
+        <p:style>
+          <a:lnRef idx="1">
+            <a:schemeClr val="accent1"/>
+          </a:lnRef>
+          <a:fillRef idx="3">
+            <a:schemeClr val="accent1"/>
+          </a:fillRef>
+          <a:effectRef idx="2">
+            <a:schemeClr val="accent1"/>
+          </a:effectRef>
+          <a:fontRef idx="minor">
+            <a:schemeClr val="lt1"/>
+          </a:fontRef>
+        </p:style>
+        <p:txBody>
+          <a:bodyPr rtlCol="0" anchor="ctr"/>
+          <a:lstStyle/>
+          <a:p>
+            <a:pPr algn="ctr"/>
+          </a:p>
+        </p:txBody>
+      </p:sp>
+      <p:sp>
+        <p:nvSpPr>
+          <p:cNvPr id="6" name="Rectangle 5"/>
+          <p:cNvSpPr/>
+          <p:nvPr/>
+        </p:nvSpPr>
+        <p:spPr>
+          <a:xfrm>
+            <a:off x="685800" y="502920"/>
+            <a:ext cx="36576" cy="658368"/>
+          </a:xfrm>
+          <a:prstGeom prst="rect">
+            <a:avLst/>
+          </a:prstGeom>
+          <a:solidFill>
+            <a:srgbClr val="D9C089"/>
+          </a:solidFill>
+          <a:ln>
+            <a:noFill/>
+          </a:ln>
+        </p:spPr>
+        <p:style>
+          <a:lnRef idx="1">
+            <a:schemeClr val="accent1"/>
+          </a:lnRef>
+          <a:fillRef idx="3">
+            <a:schemeClr val="accent1"/>
+          </a:fillRef>
+          <a:effectRef idx="2">
+            <a:schemeClr val="accent1"/>
+          </a:effectRef>
+          <a:fontRef idx="minor">
+            <a:schemeClr val="lt1"/>
+          </a:fontRef>
+        </p:style>
+        <p:txBody>
+          <a:bodyPr rtlCol="0" anchor="ctr"/>
+          <a:lstStyle/>
+          <a:p>
+            <a:pPr algn="ctr"/>
+          </a:p>
+        </p:txBody>
+      </p:sp>
+      <p:sp>
+        <p:nvSpPr>
+          <p:cNvPr id="7" name="TextBox 6"/>
+          <p:cNvSpPr txBox="1"/>
+          <p:nvPr/>
+        </p:nvSpPr>
+        <p:spPr>
+          <a:xfrm>
+            <a:off x="813816" y="502920"/>
+            <a:ext cx="10634472" cy="685800"/>
+          </a:xfrm>
+          <a:prstGeom prst="rect">
+            <a:avLst/>
+          </a:prstGeom>
+          <a:noFill/>
+        </p:spPr>
+        <p:txBody>
+          <a:bodyPr wrap="square">
+            <a:spAutoFit/>
+          </a:bodyPr>
+          <a:lstStyle/>
+          <a:p>
+            <a:pPr algn="l"/>
+            <a:r>
+              <a:rPr sz="2400" b="1" i="0">
+                <a:solidFill>
+                  <a:srgbClr val="1F2C56"/>
+                </a:solidFill>
+                <a:latin typeface="Arial"/>
+              </a:rPr>
+              <a:t>Wer für die Haltung einstellt, schuldet der Person den Fach-Aufbau</a:t>
+            </a:r>
+          </a:p>
+        </p:txBody>
+      </p:sp>
+      <p:sp>
+        <p:nvSpPr>
+          <p:cNvPr id="8" name="TextBox 7"/>
+          <p:cNvSpPr txBox="1"/>
+          <p:nvPr/>
+        </p:nvSpPr>
+        <p:spPr>
+          <a:xfrm>
+            <a:off x="685800" y="1417320"/>
+            <a:ext cx="10817352" cy="4892040"/>
+          </a:xfrm>
+          <a:prstGeom prst="rect">
+            <a:avLst/>
+          </a:prstGeom>
+          <a:noFill/>
+        </p:spPr>
+        <p:txBody>
+          <a:bodyPr wrap="square" anchor="ctr">
+            <a:spAutoFit/>
+          </a:bodyPr>
+          <a:lstStyle/>
+          <a:p>
+            <a:pPr marL="190500" indent="-190500">
+              <a:spcBef>
+                <a:spcPts val="400"/>
+              </a:spcBef>
+              <a:spcAft>
+                <a:spcPts val="200"/>
+              </a:spcAft>
+            </a:pPr>
+            <a:r>
+              <a:rPr sz="1300">
+                <a:solidFill>
+                  <a:srgbClr val="3D5466"/>
+                </a:solidFill>
+                <a:latin typeface="Arial"/>
+              </a:rPr>
+              <a:t>▸  Einarbeitungsplan: Fachkompetenz-Meilensteine nach 4 / 12 / 26 Wochen.</a:t>
+            </a:r>
+          </a:p>
+          <a:p>
+            <a:pPr marL="190500" indent="-190500">
+              <a:spcBef>
+                <a:spcPts val="400"/>
+              </a:spcBef>
+              <a:spcAft>
+                <a:spcPts val="200"/>
+              </a:spcAft>
+            </a:pPr>
+            <a:r>
+              <a:rPr sz="1300">
+                <a:solidFill>
+                  <a:srgbClr val="3D5466"/>
+                </a:solidFill>
+                <a:latin typeface="Arial"/>
+              </a:rPr>
+              <a:t>▸  Die Lücken aus dem Anforderungsprofil sind das Programm – kein Zufall.</a:t>
+            </a:r>
+          </a:p>
+          <a:p>
+            <a:pPr marL="190500" indent="-190500">
+              <a:spcBef>
+                <a:spcPts val="400"/>
+              </a:spcBef>
+              <a:spcAft>
+                <a:spcPts val="200"/>
+              </a:spcAft>
+            </a:pPr>
+            <a:r>
+              <a:rPr sz="1300">
+                <a:solidFill>
+                  <a:srgbClr val="3D5466"/>
+                </a:solidFill>
+                <a:latin typeface="Arial"/>
+              </a:rPr>
+              <a:t>▸  Pate/Mentor benennen; erste Feedbackgespräche terminieren (Brücke zu TL06).</a:t>
+            </a:r>
+          </a:p>
+          <a:p>
+            <a:pPr marL="190500" indent="-190500">
+              <a:spcBef>
+                <a:spcPts val="400"/>
+              </a:spcBef>
+              <a:spcAft>
+                <a:spcPts val="200"/>
+              </a:spcAft>
+            </a:pPr>
+            <a:r>
+              <a:rPr sz="1300">
+                <a:solidFill>
+                  <a:srgbClr val="3D5466"/>
+                </a:solidFill>
+                <a:latin typeface="Arial"/>
+              </a:rPr>
+              <a:t>▸  Haltungsstarker Kandidat hat einen Anspruch auf fachliche Entwicklung.</a:t>
+            </a:r>
+          </a:p>
+          <a:p>
+            <a:pPr marL="190500" indent="-190500">
+              <a:spcBef>
+                <a:spcPts val="400"/>
+              </a:spcBef>
+              <a:spcAft>
+                <a:spcPts val="200"/>
+              </a:spcAft>
+            </a:pPr>
+            <a:r>
+              <a:rPr sz="1300">
+                <a:solidFill>
+                  <a:srgbClr val="3D5466"/>
+                </a:solidFill>
+                <a:latin typeface="Arial"/>
+              </a:rPr>
+              <a:t>▸  Der Einarbeitungsplan ist die Gegenleistung für 'Hire for the Soul.'</a:t>
+            </a:r>
+          </a:p>
+        </p:txBody>
+      </p:sp>
+      <p:sp>
+        <p:nvSpPr>
+          <p:cNvPr id="9" name="Rectangle 8"/>
+          <p:cNvSpPr/>
+          <p:nvPr/>
+        </p:nvSpPr>
+        <p:spPr>
+          <a:xfrm>
+            <a:off x="0" y="6510528"/>
+            <a:ext cx="12188952" cy="347472"/>
+          </a:xfrm>
+          <a:prstGeom prst="rect">
+            <a:avLst/>
+          </a:prstGeom>
+          <a:solidFill>
+            <a:srgbClr val="0A1937"/>
+          </a:solidFill>
+          <a:ln>
+            <a:noFill/>
+          </a:ln>
+        </p:spPr>
+        <p:style>
+          <a:lnRef idx="1">
+            <a:schemeClr val="accent1"/>
+          </a:lnRef>
+          <a:fillRef idx="3">
+            <a:schemeClr val="accent1"/>
+          </a:fillRef>
+          <a:effectRef idx="2">
+            <a:schemeClr val="accent1"/>
+          </a:effectRef>
+          <a:fontRef idx="minor">
+            <a:schemeClr val="lt1"/>
+          </a:fontRef>
+        </p:style>
+        <p:txBody>
+          <a:bodyPr rtlCol="0" anchor="ctr"/>
+          <a:lstStyle/>
+          <a:p>
+            <a:pPr algn="ctr"/>
+          </a:p>
+        </p:txBody>
+      </p:sp>
+      <p:sp>
+        <p:nvSpPr>
+          <p:cNvPr id="10" name="TextBox 9"/>
           <p:cNvSpPr txBox="1"/>
           <p:nvPr/>
         </p:nvSpPr>
